--- a/диплом.pptx
+++ b/диплом.pptx
@@ -5,28 +5,36 @@
     <p:sldMasterId id="2147483648" r:id="rId1"/>
   </p:sldMasterIdLst>
   <p:notesMasterIdLst>
-    <p:notesMasterId r:id="rId21"/>
+    <p:notesMasterId r:id="rId26"/>
   </p:notesMasterIdLst>
+  <p:handoutMasterIdLst>
+    <p:handoutMasterId r:id="rId27"/>
+  </p:handoutMasterIdLst>
   <p:sldIdLst>
     <p:sldId id="256" r:id="rId2"/>
     <p:sldId id="286" r:id="rId3"/>
-    <p:sldId id="287" r:id="rId4"/>
-    <p:sldId id="289" r:id="rId5"/>
-    <p:sldId id="290" r:id="rId6"/>
-    <p:sldId id="291" r:id="rId7"/>
-    <p:sldId id="292" r:id="rId8"/>
-    <p:sldId id="293" r:id="rId9"/>
-    <p:sldId id="299" r:id="rId10"/>
-    <p:sldId id="300" r:id="rId11"/>
-    <p:sldId id="301" r:id="rId12"/>
-    <p:sldId id="302" r:id="rId13"/>
-    <p:sldId id="303" r:id="rId14"/>
-    <p:sldId id="304" r:id="rId15"/>
-    <p:sldId id="305" r:id="rId16"/>
-    <p:sldId id="306" r:id="rId17"/>
-    <p:sldId id="307" r:id="rId18"/>
-    <p:sldId id="308" r:id="rId19"/>
-    <p:sldId id="309" r:id="rId20"/>
+    <p:sldId id="291" r:id="rId4"/>
+    <p:sldId id="287" r:id="rId5"/>
+    <p:sldId id="289" r:id="rId6"/>
+    <p:sldId id="290" r:id="rId7"/>
+    <p:sldId id="304" r:id="rId8"/>
+    <p:sldId id="327" r:id="rId9"/>
+    <p:sldId id="311" r:id="rId10"/>
+    <p:sldId id="312" r:id="rId11"/>
+    <p:sldId id="323" r:id="rId12"/>
+    <p:sldId id="328" r:id="rId13"/>
+    <p:sldId id="292" r:id="rId14"/>
+    <p:sldId id="310" r:id="rId15"/>
+    <p:sldId id="293" r:id="rId16"/>
+    <p:sldId id="299" r:id="rId17"/>
+    <p:sldId id="300" r:id="rId18"/>
+    <p:sldId id="301" r:id="rId19"/>
+    <p:sldId id="302" r:id="rId20"/>
+    <p:sldId id="313" r:id="rId21"/>
+    <p:sldId id="314" r:id="rId22"/>
+    <p:sldId id="315" r:id="rId23"/>
+    <p:sldId id="316" r:id="rId24"/>
+    <p:sldId id="317" r:id="rId25"/>
   </p:sldIdLst>
   <p:sldSz cx="12192000" cy="6858000"/>
   <p:notesSz cx="6858000" cy="12192000"/>
@@ -128,6 +136,195 @@
     </p:ext>
   </p:extLst>
 </p:presentation>
+</file>
+
+<file path=ppt/handoutMasters/handoutMaster1.xml><?xml version="1.0" encoding="utf-8"?>
+<p:handoutMaster xmlns:a="http://schemas.openxmlformats.org/drawingml/2006/main" xmlns:r="http://schemas.openxmlformats.org/officeDocument/2006/relationships" xmlns:p="http://schemas.openxmlformats.org/presentationml/2006/main">
+  <p:cSld>
+    <p:bg>
+      <p:bgRef idx="1001">
+        <a:schemeClr val="bg1"/>
+      </p:bgRef>
+    </p:bg>
+    <p:spTree>
+      <p:nvGrpSpPr>
+        <p:cNvPr id="1" name=""/>
+        <p:cNvGrpSpPr/>
+        <p:nvPr/>
+      </p:nvGrpSpPr>
+      <p:grpSpPr>
+        <a:xfrm>
+          <a:off x="0" y="0"/>
+          <a:ext cx="0" cy="0"/>
+          <a:chOff x="0" y="0"/>
+          <a:chExt cx="0" cy="0"/>
+        </a:xfrm>
+      </p:grpSpPr>
+      <p:sp>
+        <p:nvSpPr>
+          <p:cNvPr id="2" name="Верхний колонтитул 1">
+            <a:extLst>
+              <a:ext uri="{FF2B5EF4-FFF2-40B4-BE49-F238E27FC236}">
+                <a16:creationId xmlns:a16="http://schemas.microsoft.com/office/drawing/2014/main" id="{1E96E969-FBD7-4264-86DD-FB6E4B3B5BF3}"/>
+              </a:ext>
+            </a:extLst>
+          </p:cNvPr>
+          <p:cNvSpPr>
+            <a:spLocks noGrp="1"/>
+          </p:cNvSpPr>
+          <p:nvPr>
+            <p:ph type="hdr" sz="quarter"/>
+          </p:nvPr>
+        </p:nvSpPr>
+        <p:spPr>
+          <a:xfrm>
+            <a:off x="0" y="0"/>
+            <a:ext cx="2971800" cy="611188"/>
+          </a:xfrm>
+          <a:prstGeom prst="rect">
+            <a:avLst/>
+          </a:prstGeom>
+        </p:spPr>
+        <p:txBody>
+          <a:bodyPr vert="horz" lIns="91440" tIns="45720" rIns="91440" bIns="45720" rtlCol="0"/>
+          <a:lstStyle>
+            <a:lvl1pPr algn="l">
+              <a:defRPr sz="1200"/>
+            </a:lvl1pPr>
+          </a:lstStyle>
+          <a:p>
+            <a:endParaRPr lang="ru-RU"/>
+          </a:p>
+        </p:txBody>
+      </p:sp>
+      <p:sp>
+        <p:nvSpPr>
+          <p:cNvPr id="3" name="Дата 2">
+            <a:extLst>
+              <a:ext uri="{FF2B5EF4-FFF2-40B4-BE49-F238E27FC236}">
+                <a16:creationId xmlns:a16="http://schemas.microsoft.com/office/drawing/2014/main" id="{3803649E-1179-4B9B-AAA5-22FA23EF737E}"/>
+              </a:ext>
+            </a:extLst>
+          </p:cNvPr>
+          <p:cNvSpPr>
+            <a:spLocks noGrp="1"/>
+          </p:cNvSpPr>
+          <p:nvPr>
+            <p:ph type="dt" sz="quarter" idx="1"/>
+          </p:nvPr>
+        </p:nvSpPr>
+        <p:spPr>
+          <a:xfrm>
+            <a:off x="3884613" y="0"/>
+            <a:ext cx="2971800" cy="611188"/>
+          </a:xfrm>
+          <a:prstGeom prst="rect">
+            <a:avLst/>
+          </a:prstGeom>
+        </p:spPr>
+        <p:txBody>
+          <a:bodyPr vert="horz" lIns="91440" tIns="45720" rIns="91440" bIns="45720" rtlCol="0"/>
+          <a:lstStyle>
+            <a:lvl1pPr algn="r">
+              <a:defRPr sz="1200"/>
+            </a:lvl1pPr>
+          </a:lstStyle>
+          <a:p>
+            <a:fld id="{C603E9E0-CA38-4D91-8D99-8DFCAC820452}" type="datetimeFigureOut">
+              <a:rPr lang="ru-RU" smtClean="0"/>
+              <a:t>11.06.2026</a:t>
+            </a:fld>
+            <a:endParaRPr lang="ru-RU"/>
+          </a:p>
+        </p:txBody>
+      </p:sp>
+      <p:sp>
+        <p:nvSpPr>
+          <p:cNvPr id="4" name="Нижний колонтитул 3">
+            <a:extLst>
+              <a:ext uri="{FF2B5EF4-FFF2-40B4-BE49-F238E27FC236}">
+                <a16:creationId xmlns:a16="http://schemas.microsoft.com/office/drawing/2014/main" id="{2A8DA43E-FF03-4F40-A391-B97B672892EB}"/>
+              </a:ext>
+            </a:extLst>
+          </p:cNvPr>
+          <p:cNvSpPr>
+            <a:spLocks noGrp="1"/>
+          </p:cNvSpPr>
+          <p:nvPr>
+            <p:ph type="ftr" sz="quarter" idx="2"/>
+          </p:nvPr>
+        </p:nvSpPr>
+        <p:spPr>
+          <a:xfrm>
+            <a:off x="0" y="11580813"/>
+            <a:ext cx="2971800" cy="611187"/>
+          </a:xfrm>
+          <a:prstGeom prst="rect">
+            <a:avLst/>
+          </a:prstGeom>
+        </p:spPr>
+        <p:txBody>
+          <a:bodyPr vert="horz" lIns="91440" tIns="45720" rIns="91440" bIns="45720" rtlCol="0" anchor="b"/>
+          <a:lstStyle>
+            <a:lvl1pPr algn="l">
+              <a:defRPr sz="1200"/>
+            </a:lvl1pPr>
+          </a:lstStyle>
+          <a:p>
+            <a:endParaRPr lang="ru-RU"/>
+          </a:p>
+        </p:txBody>
+      </p:sp>
+      <p:sp>
+        <p:nvSpPr>
+          <p:cNvPr id="5" name="Номер слайда 4">
+            <a:extLst>
+              <a:ext uri="{FF2B5EF4-FFF2-40B4-BE49-F238E27FC236}">
+                <a16:creationId xmlns:a16="http://schemas.microsoft.com/office/drawing/2014/main" id="{4C515F3D-E986-4E81-A1E8-12FD89CF59F7}"/>
+              </a:ext>
+            </a:extLst>
+          </p:cNvPr>
+          <p:cNvSpPr>
+            <a:spLocks noGrp="1"/>
+          </p:cNvSpPr>
+          <p:nvPr>
+            <p:ph type="sldNum" sz="quarter" idx="3"/>
+          </p:nvPr>
+        </p:nvSpPr>
+        <p:spPr>
+          <a:xfrm>
+            <a:off x="3884613" y="11580813"/>
+            <a:ext cx="2971800" cy="611187"/>
+          </a:xfrm>
+          <a:prstGeom prst="rect">
+            <a:avLst/>
+          </a:prstGeom>
+        </p:spPr>
+        <p:txBody>
+          <a:bodyPr vert="horz" lIns="91440" tIns="45720" rIns="91440" bIns="45720" rtlCol="0" anchor="b"/>
+          <a:lstStyle>
+            <a:lvl1pPr algn="r">
+              <a:defRPr sz="1200"/>
+            </a:lvl1pPr>
+          </a:lstStyle>
+          <a:p>
+            <a:fld id="{C25C609B-AD0E-4671-9AFD-36A9D6F3C45B}" type="slidenum">
+              <a:rPr lang="ru-RU" smtClean="0"/>
+              <a:t>‹#›</a:t>
+            </a:fld>
+            <a:endParaRPr lang="ru-RU"/>
+          </a:p>
+        </p:txBody>
+      </p:sp>
+    </p:spTree>
+    <p:extLst>
+      <p:ext uri="{BB962C8B-B14F-4D97-AF65-F5344CB8AC3E}">
+        <p14:creationId xmlns:p14="http://schemas.microsoft.com/office/powerpoint/2010/main" val="1192855798"/>
+      </p:ext>
+    </p:extLst>
+  </p:cSld>
+  <p:clrMap bg1="lt1" tx1="dk1" bg2="lt2" tx2="dk2" accent1="accent1" accent2="accent2" accent3="accent3" accent4="accent4" accent5="accent5" accent6="accent6" hlink="hlink" folHlink="folHlink"/>
+</p:handoutMaster>
 </file>
 
 <file path=ppt/notesMasters/notesMaster1.xml><?xml version="1.0" encoding="utf-8"?>
@@ -436,7 +633,7 @@
           <a:p>
             <a:fld id="{E7B2D30A-ED29-4ED4-8268-9B55AAC3476B}" type="datetime1">
               <a:rPr lang="en-US" smtClean="0"/>
-              <a:t>6/10/2026</a:t>
+              <a:t>6/11/2026</a:t>
             </a:fld>
             <a:endParaRPr lang="en-US"/>
           </a:p>
@@ -1503,14 +1700,102 @@
       </p:sp>
       <p:sp>
         <p:nvSpPr>
-          <p:cNvPr id="3" name="TextBox 2"/>
+          <p:cNvPr id="7" name="Прямоугольник 6"/>
+          <p:cNvSpPr/>
+          <p:nvPr/>
+        </p:nvSpPr>
+        <p:spPr>
+          <a:xfrm>
+            <a:off x="10840870" y="6054593"/>
+            <a:ext cx="686406" cy="369332"/>
+          </a:xfrm>
+          <a:prstGeom prst="rect">
+            <a:avLst/>
+          </a:prstGeom>
+        </p:spPr>
+        <p:txBody>
+          <a:bodyPr wrap="none">
+            <a:spAutoFit/>
+          </a:bodyPr>
+          <a:lstStyle/>
+          <a:p>
+            <a:fld id="{C1FF6DA9-008F-8B48-92A6-B652298478BF}" type="slidenum">
+              <a:rPr lang="en-US" b="1" smtClean="0">
+                <a:latin typeface="Segoe UI" panose="020B0502040204020203" pitchFamily="34" charset="0"/>
+                <a:cs typeface="Segoe UI" panose="020B0502040204020203" pitchFamily="34" charset="0"/>
+              </a:rPr>
+              <a:pPr/>
+              <a:t>10</a:t>
+            </a:fld>
+            <a:r>
+              <a:rPr lang="en-US" b="1" dirty="0">
+                <a:latin typeface="Segoe UI" panose="020B0502040204020203" pitchFamily="34" charset="0"/>
+                <a:cs typeface="Segoe UI" panose="020B0502040204020203" pitchFamily="34" charset="0"/>
+              </a:rPr>
+              <a:t>/2</a:t>
+            </a:r>
+            <a:r>
+              <a:rPr lang="ru-RU" b="1" dirty="0">
+                <a:latin typeface="Segoe UI" panose="020B0502040204020203" pitchFamily="34" charset="0"/>
+                <a:cs typeface="Segoe UI" panose="020B0502040204020203" pitchFamily="34" charset="0"/>
+              </a:rPr>
+              <a:t>6</a:t>
+            </a:r>
+            <a:endParaRPr lang="en-US" b="1" dirty="0">
+              <a:latin typeface="Segoe UI" panose="020B0502040204020203" pitchFamily="34" charset="0"/>
+              <a:cs typeface="Segoe UI" panose="020B0502040204020203" pitchFamily="34" charset="0"/>
+            </a:endParaRPr>
+          </a:p>
+        </p:txBody>
+      </p:sp>
+      <p:pic>
+        <p:nvPicPr>
+          <p:cNvPr id="5" name="image4.png">
+            <a:extLst>
+              <a:ext uri="{FF2B5EF4-FFF2-40B4-BE49-F238E27FC236}">
+                <a16:creationId xmlns:a16="http://schemas.microsoft.com/office/drawing/2014/main" id="{E3722F77-2DF4-4C34-AE9A-8342C7A896BF}"/>
+              </a:ext>
+            </a:extLst>
+          </p:cNvPr>
+          <p:cNvPicPr>
+            <a:picLocks noChangeAspect="1"/>
+          </p:cNvPicPr>
+          <p:nvPr/>
+        </p:nvPicPr>
+        <p:blipFill>
+          <a:blip r:embed="rId2"/>
+          <a:srcRect/>
+          <a:stretch>
+            <a:fillRect/>
+          </a:stretch>
+        </p:blipFill>
+        <p:spPr>
+          <a:xfrm>
+            <a:off x="1213734" y="1745014"/>
+            <a:ext cx="9627136" cy="3570404"/>
+          </a:xfrm>
+          <a:prstGeom prst="rect">
+            <a:avLst/>
+          </a:prstGeom>
+          <a:ln/>
+        </p:spPr>
+      </p:pic>
+      <p:sp>
+        <p:nvSpPr>
+          <p:cNvPr id="6" name="TextBox 5">
+            <a:extLst>
+              <a:ext uri="{FF2B5EF4-FFF2-40B4-BE49-F238E27FC236}">
+                <a16:creationId xmlns:a16="http://schemas.microsoft.com/office/drawing/2014/main" id="{C4290782-BAD6-41AF-8B14-CDAB851494A7}"/>
+              </a:ext>
+            </a:extLst>
+          </p:cNvPr>
           <p:cNvSpPr txBox="1"/>
           <p:nvPr/>
         </p:nvSpPr>
         <p:spPr>
           <a:xfrm>
-            <a:off x="1981981" y="148977"/>
-            <a:ext cx="8807116" cy="707886"/>
+            <a:off x="1667780" y="148977"/>
+            <a:ext cx="8856133" cy="707886"/>
           </a:xfrm>
           <a:prstGeom prst="rect">
             <a:avLst/>
@@ -1535,104 +1820,18 @@
               <a:rPr lang="ru-RU" sz="4000" dirty="0">
                 <a:latin typeface="+mj-lt"/>
               </a:rPr>
-              <a:t>Основной функционал системы</a:t>
+              <a:t>Схемы работы модуля загрузки</a:t>
             </a:r>
             <a:endParaRPr sz="4000" dirty="0">
               <a:latin typeface="+mj-lt"/>
             </a:endParaRPr>
-          </a:p>
-        </p:txBody>
-      </p:sp>
-      <p:sp>
-        <p:nvSpPr>
-          <p:cNvPr id="7" name="Прямоугольник 6"/>
-          <p:cNvSpPr/>
-          <p:nvPr/>
-        </p:nvSpPr>
-        <p:spPr>
-          <a:xfrm>
-            <a:off x="10840870" y="6054593"/>
-            <a:ext cx="686406" cy="369332"/>
-          </a:xfrm>
-          <a:prstGeom prst="rect">
-            <a:avLst/>
-          </a:prstGeom>
-        </p:spPr>
-        <p:txBody>
-          <a:bodyPr wrap="none">
-            <a:spAutoFit/>
-          </a:bodyPr>
-          <a:lstStyle/>
-          <a:p>
-            <a:fld id="{C1FF6DA9-008F-8B48-92A6-B652298478BF}" type="slidenum">
-              <a:rPr lang="en-US" b="1" smtClean="0">
-                <a:latin typeface="Segoe UI" panose="020B0502040204020203" pitchFamily="34" charset="0"/>
-                <a:cs typeface="Segoe UI" panose="020B0502040204020203" pitchFamily="34" charset="0"/>
-              </a:rPr>
-              <a:pPr/>
-              <a:t>10</a:t>
-            </a:fld>
-            <a:r>
-              <a:rPr lang="en-US" b="1" dirty="0">
-                <a:latin typeface="Segoe UI" panose="020B0502040204020203" pitchFamily="34" charset="0"/>
-                <a:cs typeface="Segoe UI" panose="020B0502040204020203" pitchFamily="34" charset="0"/>
-              </a:rPr>
-              <a:t>/2</a:t>
-            </a:r>
-            <a:r>
-              <a:rPr lang="ru-RU" b="1" dirty="0">
-                <a:latin typeface="Segoe UI" panose="020B0502040204020203" pitchFamily="34" charset="0"/>
-                <a:cs typeface="Segoe UI" panose="020B0502040204020203" pitchFamily="34" charset="0"/>
-              </a:rPr>
-              <a:t>6</a:t>
-            </a:r>
-            <a:endParaRPr lang="en-US" b="1" dirty="0">
-              <a:latin typeface="Segoe UI" panose="020B0502040204020203" pitchFamily="34" charset="0"/>
-              <a:cs typeface="Segoe UI" panose="020B0502040204020203" pitchFamily="34" charset="0"/>
-            </a:endParaRPr>
-          </a:p>
-        </p:txBody>
-      </p:sp>
-      <p:sp>
-        <p:nvSpPr>
-          <p:cNvPr id="4" name="TextBox 3">
-            <a:extLst>
-              <a:ext uri="{FF2B5EF4-FFF2-40B4-BE49-F238E27FC236}">
-                <a16:creationId xmlns:a16="http://schemas.microsoft.com/office/drawing/2014/main" id="{70CFF030-81F6-46FA-948F-C1DA59ACB02F}"/>
-              </a:ext>
-            </a:extLst>
-          </p:cNvPr>
-          <p:cNvSpPr txBox="1"/>
-          <p:nvPr/>
-        </p:nvSpPr>
-        <p:spPr>
-          <a:xfrm>
-            <a:off x="4268073" y="2814149"/>
-            <a:ext cx="1258679" cy="369332"/>
-          </a:xfrm>
-          <a:prstGeom prst="rect">
-            <a:avLst/>
-          </a:prstGeom>
-          <a:noFill/>
-        </p:spPr>
-        <p:txBody>
-          <a:bodyPr wrap="none" rtlCol="0">
-            <a:spAutoFit/>
-          </a:bodyPr>
-          <a:lstStyle/>
-          <a:p>
-            <a:pPr algn="r"/>
-            <a:r>
-              <a:rPr lang="ru-RU" dirty="0"/>
-              <a:t>Картинка</a:t>
-            </a:r>
           </a:p>
         </p:txBody>
       </p:sp>
     </p:spTree>
     <p:extLst>
       <p:ext uri="{BB962C8B-B14F-4D97-AF65-F5344CB8AC3E}">
-        <p14:creationId xmlns:p14="http://schemas.microsoft.com/office/powerpoint/2010/main" val="4169047097"/>
+        <p14:creationId xmlns:p14="http://schemas.microsoft.com/office/powerpoint/2010/main" val="3008998907"/>
       </p:ext>
     </p:extLst>
   </p:cSld>
@@ -1708,14 +1907,102 @@
       </p:sp>
       <p:sp>
         <p:nvSpPr>
-          <p:cNvPr id="3" name="TextBox 2"/>
+          <p:cNvPr id="7" name="Прямоугольник 6"/>
+          <p:cNvSpPr/>
+          <p:nvPr/>
+        </p:nvSpPr>
+        <p:spPr>
+          <a:xfrm>
+            <a:off x="10840870" y="6054593"/>
+            <a:ext cx="686406" cy="369332"/>
+          </a:xfrm>
+          <a:prstGeom prst="rect">
+            <a:avLst/>
+          </a:prstGeom>
+        </p:spPr>
+        <p:txBody>
+          <a:bodyPr wrap="none">
+            <a:spAutoFit/>
+          </a:bodyPr>
+          <a:lstStyle/>
+          <a:p>
+            <a:fld id="{C1FF6DA9-008F-8B48-92A6-B652298478BF}" type="slidenum">
+              <a:rPr lang="en-US" b="1" smtClean="0">
+                <a:latin typeface="Segoe UI" panose="020B0502040204020203" pitchFamily="34" charset="0"/>
+                <a:cs typeface="Segoe UI" panose="020B0502040204020203" pitchFamily="34" charset="0"/>
+              </a:rPr>
+              <a:pPr/>
+              <a:t>11</a:t>
+            </a:fld>
+            <a:r>
+              <a:rPr lang="en-US" b="1" dirty="0">
+                <a:latin typeface="Segoe UI" panose="020B0502040204020203" pitchFamily="34" charset="0"/>
+                <a:cs typeface="Segoe UI" panose="020B0502040204020203" pitchFamily="34" charset="0"/>
+              </a:rPr>
+              <a:t>/2</a:t>
+            </a:r>
+            <a:r>
+              <a:rPr lang="ru-RU" b="1" dirty="0">
+                <a:latin typeface="Segoe UI" panose="020B0502040204020203" pitchFamily="34" charset="0"/>
+                <a:cs typeface="Segoe UI" panose="020B0502040204020203" pitchFamily="34" charset="0"/>
+              </a:rPr>
+              <a:t>6</a:t>
+            </a:r>
+            <a:endParaRPr lang="en-US" b="1" dirty="0">
+              <a:latin typeface="Segoe UI" panose="020B0502040204020203" pitchFamily="34" charset="0"/>
+              <a:cs typeface="Segoe UI" panose="020B0502040204020203" pitchFamily="34" charset="0"/>
+            </a:endParaRPr>
+          </a:p>
+        </p:txBody>
+      </p:sp>
+      <p:pic>
+        <p:nvPicPr>
+          <p:cNvPr id="5" name="image9.png">
+            <a:extLst>
+              <a:ext uri="{FF2B5EF4-FFF2-40B4-BE49-F238E27FC236}">
+                <a16:creationId xmlns:a16="http://schemas.microsoft.com/office/drawing/2014/main" id="{45730E13-1CF9-49E5-8B43-0D5C9915152A}"/>
+              </a:ext>
+            </a:extLst>
+          </p:cNvPr>
+          <p:cNvPicPr>
+            <a:picLocks noChangeAspect="1"/>
+          </p:cNvPicPr>
+          <p:nvPr/>
+        </p:nvPicPr>
+        <p:blipFill>
+          <a:blip r:embed="rId2"/>
+          <a:srcRect/>
+          <a:stretch>
+            <a:fillRect/>
+          </a:stretch>
+        </p:blipFill>
+        <p:spPr>
+          <a:xfrm>
+            <a:off x="1827763" y="1605473"/>
+            <a:ext cx="8536474" cy="4237062"/>
+          </a:xfrm>
+          <a:prstGeom prst="rect">
+            <a:avLst/>
+          </a:prstGeom>
+          <a:ln/>
+        </p:spPr>
+      </p:pic>
+      <p:sp>
+        <p:nvSpPr>
+          <p:cNvPr id="6" name="TextBox 5">
+            <a:extLst>
+              <a:ext uri="{FF2B5EF4-FFF2-40B4-BE49-F238E27FC236}">
+                <a16:creationId xmlns:a16="http://schemas.microsoft.com/office/drawing/2014/main" id="{A451AFBA-8748-444B-A852-9B063767FCF9}"/>
+              </a:ext>
+            </a:extLst>
+          </p:cNvPr>
           <p:cNvSpPr txBox="1"/>
           <p:nvPr/>
         </p:nvSpPr>
         <p:spPr>
           <a:xfrm>
-            <a:off x="1981981" y="148977"/>
-            <a:ext cx="8807116" cy="707886"/>
+            <a:off x="1667780" y="148977"/>
+            <a:ext cx="8856133" cy="707886"/>
           </a:xfrm>
           <a:prstGeom prst="rect">
             <a:avLst/>
@@ -1740,104 +2027,18 @@
               <a:rPr lang="ru-RU" sz="4000" dirty="0">
                 <a:latin typeface="+mj-lt"/>
               </a:rPr>
-              <a:t>Основной функционал системы</a:t>
+              <a:t>Схемы работы модуля загрузки</a:t>
             </a:r>
             <a:endParaRPr sz="4000" dirty="0">
               <a:latin typeface="+mj-lt"/>
             </a:endParaRPr>
-          </a:p>
-        </p:txBody>
-      </p:sp>
-      <p:sp>
-        <p:nvSpPr>
-          <p:cNvPr id="7" name="Прямоугольник 6"/>
-          <p:cNvSpPr/>
-          <p:nvPr/>
-        </p:nvSpPr>
-        <p:spPr>
-          <a:xfrm>
-            <a:off x="10840870" y="6054593"/>
-            <a:ext cx="686406" cy="369332"/>
-          </a:xfrm>
-          <a:prstGeom prst="rect">
-            <a:avLst/>
-          </a:prstGeom>
-        </p:spPr>
-        <p:txBody>
-          <a:bodyPr wrap="none">
-            <a:spAutoFit/>
-          </a:bodyPr>
-          <a:lstStyle/>
-          <a:p>
-            <a:fld id="{C1FF6DA9-008F-8B48-92A6-B652298478BF}" type="slidenum">
-              <a:rPr lang="en-US" b="1" smtClean="0">
-                <a:latin typeface="Segoe UI" panose="020B0502040204020203" pitchFamily="34" charset="0"/>
-                <a:cs typeface="Segoe UI" panose="020B0502040204020203" pitchFamily="34" charset="0"/>
-              </a:rPr>
-              <a:pPr/>
-              <a:t>11</a:t>
-            </a:fld>
-            <a:r>
-              <a:rPr lang="en-US" b="1" dirty="0">
-                <a:latin typeface="Segoe UI" panose="020B0502040204020203" pitchFamily="34" charset="0"/>
-                <a:cs typeface="Segoe UI" panose="020B0502040204020203" pitchFamily="34" charset="0"/>
-              </a:rPr>
-              <a:t>/2</a:t>
-            </a:r>
-            <a:r>
-              <a:rPr lang="ru-RU" b="1" dirty="0">
-                <a:latin typeface="Segoe UI" panose="020B0502040204020203" pitchFamily="34" charset="0"/>
-                <a:cs typeface="Segoe UI" panose="020B0502040204020203" pitchFamily="34" charset="0"/>
-              </a:rPr>
-              <a:t>6</a:t>
-            </a:r>
-            <a:endParaRPr lang="en-US" b="1" dirty="0">
-              <a:latin typeface="Segoe UI" panose="020B0502040204020203" pitchFamily="34" charset="0"/>
-              <a:cs typeface="Segoe UI" panose="020B0502040204020203" pitchFamily="34" charset="0"/>
-            </a:endParaRPr>
-          </a:p>
-        </p:txBody>
-      </p:sp>
-      <p:sp>
-        <p:nvSpPr>
-          <p:cNvPr id="4" name="TextBox 3">
-            <a:extLst>
-              <a:ext uri="{FF2B5EF4-FFF2-40B4-BE49-F238E27FC236}">
-                <a16:creationId xmlns:a16="http://schemas.microsoft.com/office/drawing/2014/main" id="{70CFF030-81F6-46FA-948F-C1DA59ACB02F}"/>
-              </a:ext>
-            </a:extLst>
-          </p:cNvPr>
-          <p:cNvSpPr txBox="1"/>
-          <p:nvPr/>
-        </p:nvSpPr>
-        <p:spPr>
-          <a:xfrm>
-            <a:off x="4268073" y="2814149"/>
-            <a:ext cx="1258679" cy="369332"/>
-          </a:xfrm>
-          <a:prstGeom prst="rect">
-            <a:avLst/>
-          </a:prstGeom>
-          <a:noFill/>
-        </p:spPr>
-        <p:txBody>
-          <a:bodyPr wrap="none" rtlCol="0">
-            <a:spAutoFit/>
-          </a:bodyPr>
-          <a:lstStyle/>
-          <a:p>
-            <a:pPr algn="r"/>
-            <a:r>
-              <a:rPr lang="ru-RU" dirty="0"/>
-              <a:t>Картинка</a:t>
-            </a:r>
           </a:p>
         </p:txBody>
       </p:sp>
     </p:spTree>
     <p:extLst>
       <p:ext uri="{BB962C8B-B14F-4D97-AF65-F5344CB8AC3E}">
-        <p14:creationId xmlns:p14="http://schemas.microsoft.com/office/powerpoint/2010/main" val="4160481848"/>
+        <p14:creationId xmlns:p14="http://schemas.microsoft.com/office/powerpoint/2010/main" val="742694702"/>
       </p:ext>
     </p:extLst>
   </p:cSld>
@@ -1913,14 +2114,70 @@
       </p:sp>
       <p:sp>
         <p:nvSpPr>
-          <p:cNvPr id="3" name="TextBox 2"/>
+          <p:cNvPr id="7" name="Прямоугольник 6"/>
+          <p:cNvSpPr/>
+          <p:nvPr/>
+        </p:nvSpPr>
+        <p:spPr>
+          <a:xfrm>
+            <a:off x="10840870" y="6054593"/>
+            <a:ext cx="686406" cy="369332"/>
+          </a:xfrm>
+          <a:prstGeom prst="rect">
+            <a:avLst/>
+          </a:prstGeom>
+        </p:spPr>
+        <p:txBody>
+          <a:bodyPr wrap="none">
+            <a:spAutoFit/>
+          </a:bodyPr>
+          <a:lstStyle/>
+          <a:p>
+            <a:fld id="{C1FF6DA9-008F-8B48-92A6-B652298478BF}" type="slidenum">
+              <a:rPr lang="en-US" b="1" smtClean="0">
+                <a:latin typeface="Segoe UI" panose="020B0502040204020203" pitchFamily="34" charset="0"/>
+                <a:cs typeface="Segoe UI" panose="020B0502040204020203" pitchFamily="34" charset="0"/>
+              </a:rPr>
+              <a:pPr/>
+              <a:t>12</a:t>
+            </a:fld>
+            <a:r>
+              <a:rPr lang="en-US" b="1" dirty="0">
+                <a:latin typeface="Segoe UI" panose="020B0502040204020203" pitchFamily="34" charset="0"/>
+                <a:cs typeface="Segoe UI" panose="020B0502040204020203" pitchFamily="34" charset="0"/>
+              </a:rPr>
+              <a:t>/2</a:t>
+            </a:r>
+            <a:r>
+              <a:rPr lang="ru-RU" b="1" dirty="0">
+                <a:latin typeface="Segoe UI" panose="020B0502040204020203" pitchFamily="34" charset="0"/>
+                <a:cs typeface="Segoe UI" panose="020B0502040204020203" pitchFamily="34" charset="0"/>
+              </a:rPr>
+              <a:t>6</a:t>
+            </a:r>
+            <a:endParaRPr lang="en-US" b="1" dirty="0">
+              <a:latin typeface="Segoe UI" panose="020B0502040204020203" pitchFamily="34" charset="0"/>
+              <a:cs typeface="Segoe UI" panose="020B0502040204020203" pitchFamily="34" charset="0"/>
+            </a:endParaRPr>
+          </a:p>
+        </p:txBody>
+      </p:sp>
+      <p:sp>
+        <p:nvSpPr>
+          <p:cNvPr id="6" name="TextBox 5">
+            <a:extLst>
+              <a:ext uri="{FF2B5EF4-FFF2-40B4-BE49-F238E27FC236}">
+                <a16:creationId xmlns:a16="http://schemas.microsoft.com/office/drawing/2014/main" id="{A451AFBA-8748-444B-A852-9B063767FCF9}"/>
+              </a:ext>
+            </a:extLst>
+          </p:cNvPr>
           <p:cNvSpPr txBox="1"/>
           <p:nvPr/>
         </p:nvSpPr>
         <p:spPr>
           <a:xfrm>
-            <a:off x="1981981" y="148977"/>
-            <a:ext cx="8807116" cy="707886"/>
+            <a:off x="1227437" y="148977"/>
+            <a:ext cx="9736820" cy="707886"/>
           </a:xfrm>
           <a:prstGeom prst="rect">
             <a:avLst/>
@@ -1945,7 +2202,7 @@
               <a:rPr lang="ru-RU" sz="4000" dirty="0">
                 <a:latin typeface="+mj-lt"/>
               </a:rPr>
-              <a:t>Основной функционал системы</a:t>
+              <a:t>Схемы работы клиентского модуля</a:t>
             </a:r>
             <a:endParaRPr sz="4000" dirty="0">
               <a:latin typeface="+mj-lt"/>
@@ -1953,96 +2210,40 @@
           </a:p>
         </p:txBody>
       </p:sp>
-      <p:sp>
-        <p:nvSpPr>
-          <p:cNvPr id="7" name="Прямоугольник 6"/>
-          <p:cNvSpPr/>
-          <p:nvPr/>
-        </p:nvSpPr>
-        <p:spPr>
-          <a:xfrm>
-            <a:off x="10840870" y="6054593"/>
-            <a:ext cx="686406" cy="369332"/>
-          </a:xfrm>
-          <a:prstGeom prst="rect">
-            <a:avLst/>
-          </a:prstGeom>
-        </p:spPr>
-        <p:txBody>
-          <a:bodyPr wrap="none">
-            <a:spAutoFit/>
-          </a:bodyPr>
-          <a:lstStyle/>
-          <a:p>
-            <a:fld id="{C1FF6DA9-008F-8B48-92A6-B652298478BF}" type="slidenum">
-              <a:rPr lang="en-US" b="1" smtClean="0">
-                <a:latin typeface="Segoe UI" panose="020B0502040204020203" pitchFamily="34" charset="0"/>
-                <a:cs typeface="Segoe UI" panose="020B0502040204020203" pitchFamily="34" charset="0"/>
-              </a:rPr>
-              <a:pPr/>
-              <a:t>12</a:t>
-            </a:fld>
-            <a:r>
-              <a:rPr lang="en-US" b="1" dirty="0">
-                <a:latin typeface="Segoe UI" panose="020B0502040204020203" pitchFamily="34" charset="0"/>
-                <a:cs typeface="Segoe UI" panose="020B0502040204020203" pitchFamily="34" charset="0"/>
-              </a:rPr>
-              <a:t>/2</a:t>
-            </a:r>
-            <a:r>
-              <a:rPr lang="ru-RU" b="1" dirty="0">
-                <a:latin typeface="Segoe UI" panose="020B0502040204020203" pitchFamily="34" charset="0"/>
-                <a:cs typeface="Segoe UI" panose="020B0502040204020203" pitchFamily="34" charset="0"/>
-              </a:rPr>
-              <a:t>6</a:t>
-            </a:r>
-            <a:endParaRPr lang="en-US" b="1" dirty="0">
-              <a:latin typeface="Segoe UI" panose="020B0502040204020203" pitchFamily="34" charset="0"/>
-              <a:cs typeface="Segoe UI" panose="020B0502040204020203" pitchFamily="34" charset="0"/>
-            </a:endParaRPr>
-          </a:p>
-        </p:txBody>
-      </p:sp>
-      <p:sp>
-        <p:nvSpPr>
-          <p:cNvPr id="4" name="TextBox 3">
+      <p:pic>
+        <p:nvPicPr>
+          <p:cNvPr id="3" name="Рисунок 2">
             <a:extLst>
               <a:ext uri="{FF2B5EF4-FFF2-40B4-BE49-F238E27FC236}">
-                <a16:creationId xmlns:a16="http://schemas.microsoft.com/office/drawing/2014/main" id="{70CFF030-81F6-46FA-948F-C1DA59ACB02F}"/>
+                <a16:creationId xmlns:a16="http://schemas.microsoft.com/office/drawing/2014/main" id="{6B6C0217-488A-4179-B3BF-12FBE5D08E97}"/>
               </a:ext>
             </a:extLst>
           </p:cNvPr>
-          <p:cNvSpPr txBox="1"/>
-          <p:nvPr/>
-        </p:nvSpPr>
-        <p:spPr>
-          <a:xfrm>
-            <a:off x="4268073" y="2814149"/>
-            <a:ext cx="1258679" cy="369332"/>
-          </a:xfrm>
-          <a:prstGeom prst="rect">
-            <a:avLst/>
-          </a:prstGeom>
-          <a:noFill/>
-        </p:spPr>
-        <p:txBody>
-          <a:bodyPr wrap="none" rtlCol="0">
-            <a:spAutoFit/>
-          </a:bodyPr>
-          <a:lstStyle/>
-          <a:p>
-            <a:pPr algn="r"/>
-            <a:r>
-              <a:rPr lang="ru-RU" dirty="0"/>
-              <a:t>Картинка</a:t>
-            </a:r>
-          </a:p>
-        </p:txBody>
-      </p:sp>
+          <p:cNvPicPr>
+            <a:picLocks noChangeAspect="1"/>
+          </p:cNvPicPr>
+          <p:nvPr/>
+        </p:nvPicPr>
+        <p:blipFill>
+          <a:blip r:embed="rId2"/>
+          <a:stretch>
+            <a:fillRect/>
+          </a:stretch>
+        </p:blipFill>
+        <p:spPr>
+          <a:xfrm>
+            <a:off x="3376289" y="1154817"/>
+            <a:ext cx="5561719" cy="5439633"/>
+          </a:xfrm>
+          <a:prstGeom prst="rect">
+            <a:avLst/>
+          </a:prstGeom>
+        </p:spPr>
+      </p:pic>
     </p:spTree>
     <p:extLst>
       <p:ext uri="{BB962C8B-B14F-4D97-AF65-F5344CB8AC3E}">
-        <p14:creationId xmlns:p14="http://schemas.microsoft.com/office/powerpoint/2010/main" val="3698923561"/>
+        <p14:creationId xmlns:p14="http://schemas.microsoft.com/office/powerpoint/2010/main" val="3597631072"/>
       </p:ext>
     </p:extLst>
   </p:cSld>
@@ -2055,6 +2256,16 @@
 <file path=ppt/slides/slide13.xml><?xml version="1.0" encoding="utf-8"?>
 <p:sld xmlns:a="http://schemas.openxmlformats.org/drawingml/2006/main" xmlns:r="http://schemas.openxmlformats.org/officeDocument/2006/relationships" xmlns:p="http://schemas.openxmlformats.org/presentationml/2006/main">
   <p:cSld>
+    <p:bg>
+      <p:bgPr>
+        <a:solidFill>
+          <a:schemeClr val="bg1">
+            <a:lumMod val="95000"/>
+          </a:schemeClr>
+        </a:solidFill>
+        <a:effectLst/>
+      </p:bgPr>
+    </p:bg>
     <p:spTree>
       <p:nvGrpSpPr>
         <p:cNvPr id="1" name=""/>
@@ -2213,7 +2424,7 @@
           <p:cNvPr id="4" name="TextBox 3">
             <a:extLst>
               <a:ext uri="{FF2B5EF4-FFF2-40B4-BE49-F238E27FC236}">
-                <a16:creationId xmlns:a16="http://schemas.microsoft.com/office/drawing/2014/main" id="{70CFF030-81F6-46FA-948F-C1DA59ACB02F}"/>
+                <a16:creationId xmlns:a16="http://schemas.microsoft.com/office/drawing/2014/main" id="{3BD2DC0D-83F0-4C36-9CA7-C600A9C79A63}"/>
               </a:ext>
             </a:extLst>
           </p:cNvPr>
@@ -2222,8 +2433,8 @@
         </p:nvSpPr>
         <p:spPr>
           <a:xfrm>
-            <a:off x="4268073" y="2814149"/>
-            <a:ext cx="1258679" cy="369332"/>
+            <a:off x="2263708" y="2551837"/>
+            <a:ext cx="7664278" cy="1754326"/>
           </a:xfrm>
           <a:prstGeom prst="rect">
             <a:avLst/>
@@ -2236,10 +2447,71 @@
           </a:bodyPr>
           <a:lstStyle/>
           <a:p>
-            <a:pPr algn="r"/>
+            <a:pPr marL="285750" indent="-285750">
+              <a:buFont typeface="Arial" panose="020B0604020202020204" pitchFamily="34" charset="0"/>
+              <a:buChar char="•"/>
+            </a:pPr>
             <a:r>
               <a:rPr lang="ru-RU" dirty="0"/>
-              <a:t>Картинка</a:t>
+              <a:t>Произведение параметрического поиска</a:t>
+            </a:r>
+          </a:p>
+          <a:p>
+            <a:pPr marL="285750" indent="-285750">
+              <a:buFont typeface="Arial" panose="020B0604020202020204" pitchFamily="34" charset="0"/>
+              <a:buChar char="•"/>
+            </a:pPr>
+            <a:r>
+              <a:rPr lang="ru-RU" dirty="0"/>
+              <a:t>Возможность выбора режима работы прибора</a:t>
+            </a:r>
+          </a:p>
+          <a:p>
+            <a:pPr marL="285750" indent="-285750">
+              <a:buFont typeface="Arial" panose="020B0604020202020204" pitchFamily="34" charset="0"/>
+              <a:buChar char="•"/>
+            </a:pPr>
+            <a:r>
+              <a:rPr lang="ru-RU" dirty="0"/>
+              <a:t>Возможность указания погрешности</a:t>
+            </a:r>
+          </a:p>
+          <a:p>
+            <a:pPr marL="285750" indent="-285750">
+              <a:buFont typeface="Arial" panose="020B0604020202020204" pitchFamily="34" charset="0"/>
+              <a:buChar char="•"/>
+            </a:pPr>
+            <a:r>
+              <a:rPr lang="ru-RU" dirty="0"/>
+              <a:t>Возможность выбора нескольких физических величин</a:t>
+            </a:r>
+          </a:p>
+          <a:p>
+            <a:pPr marL="285750" indent="-285750">
+              <a:buFont typeface="Arial" panose="020B0604020202020204" pitchFamily="34" charset="0"/>
+              <a:buChar char="•"/>
+            </a:pPr>
+            <a:r>
+              <a:rPr lang="ru-RU" dirty="0"/>
+              <a:t>Выдача дополнительных сведений о приборе</a:t>
+            </a:r>
+          </a:p>
+          <a:p>
+            <a:pPr marL="285750" indent="-285750">
+              <a:buFont typeface="Arial" panose="020B0604020202020204" pitchFamily="34" charset="0"/>
+              <a:buChar char="•"/>
+            </a:pPr>
+            <a:r>
+              <a:rPr lang="ru-RU" dirty="0"/>
+              <a:t>Выдача </a:t>
+            </a:r>
+            <a:r>
+              <a:rPr lang="en-US" dirty="0"/>
+              <a:t>PDF-</a:t>
+            </a:r>
+            <a:r>
+              <a:rPr lang="ru-RU" dirty="0"/>
+              <a:t>документа соответствующего средства измерения</a:t>
             </a:r>
           </a:p>
         </p:txBody>
@@ -2247,7 +2519,7 @@
     </p:spTree>
     <p:extLst>
       <p:ext uri="{BB962C8B-B14F-4D97-AF65-F5344CB8AC3E}">
-        <p14:creationId xmlns:p14="http://schemas.microsoft.com/office/powerpoint/2010/main" val="617752945"/>
+        <p14:creationId xmlns:p14="http://schemas.microsoft.com/office/powerpoint/2010/main" val="199149412"/>
       </p:ext>
     </p:extLst>
   </p:cSld>
@@ -2330,7 +2602,7 @@
         <p:spPr>
           <a:xfrm>
             <a:off x="1981981" y="148977"/>
-            <a:ext cx="6228368" cy="707886"/>
+            <a:ext cx="8807116" cy="707886"/>
           </a:xfrm>
           <a:prstGeom prst="rect">
             <a:avLst/>
@@ -2355,7 +2627,7 @@
               <a:rPr lang="ru-RU" sz="4000" dirty="0">
                 <a:latin typeface="+mj-lt"/>
               </a:rPr>
-              <a:t>Архитектура системы</a:t>
+              <a:t>Основной функционал системы</a:t>
             </a:r>
             <a:endParaRPr sz="4000" dirty="0">
               <a:latin typeface="+mj-lt"/>
@@ -2413,10 +2685,39 @@
           </a:p>
         </p:txBody>
       </p:sp>
+      <p:pic>
+        <p:nvPicPr>
+          <p:cNvPr id="13" name="Рисунок 12">
+            <a:extLst>
+              <a:ext uri="{FF2B5EF4-FFF2-40B4-BE49-F238E27FC236}">
+                <a16:creationId xmlns:a16="http://schemas.microsoft.com/office/drawing/2014/main" id="{E7928D43-E2E8-48B1-8558-45848B9935F6}"/>
+              </a:ext>
+            </a:extLst>
+          </p:cNvPr>
+          <p:cNvPicPr>
+            <a:picLocks noChangeAspect="1"/>
+          </p:cNvPicPr>
+          <p:nvPr/>
+        </p:nvPicPr>
+        <p:blipFill rotWithShape="1">
+          <a:blip r:embed="rId2"/>
+          <a:srcRect l="14888" r="15685" b="45223"/>
+          <a:stretch/>
+        </p:blipFill>
+        <p:spPr>
+          <a:xfrm>
+            <a:off x="1201678" y="1438611"/>
+            <a:ext cx="9788338" cy="4344121"/>
+          </a:xfrm>
+          <a:prstGeom prst="rect">
+            <a:avLst/>
+          </a:prstGeom>
+        </p:spPr>
+      </p:pic>
     </p:spTree>
     <p:extLst>
       <p:ext uri="{BB962C8B-B14F-4D97-AF65-F5344CB8AC3E}">
-        <p14:creationId xmlns:p14="http://schemas.microsoft.com/office/powerpoint/2010/main" val="1038954094"/>
+        <p14:creationId xmlns:p14="http://schemas.microsoft.com/office/powerpoint/2010/main" val="1689256417"/>
       </p:ext>
     </p:extLst>
   </p:cSld>
@@ -2524,7 +2825,7 @@
               <a:rPr lang="ru-RU" sz="4000" dirty="0">
                 <a:latin typeface="+mj-lt"/>
               </a:rPr>
-              <a:t>Интерфейс и взаимодействие</a:t>
+              <a:t>Основной функционал системы</a:t>
             </a:r>
             <a:endParaRPr sz="4000" dirty="0">
               <a:latin typeface="+mj-lt"/>
@@ -2582,46 +2883,39 @@
           </a:p>
         </p:txBody>
       </p:sp>
-      <p:sp>
-        <p:nvSpPr>
-          <p:cNvPr id="4" name="TextBox 3">
+      <p:pic>
+        <p:nvPicPr>
+          <p:cNvPr id="15" name="Рисунок 14">
             <a:extLst>
               <a:ext uri="{FF2B5EF4-FFF2-40B4-BE49-F238E27FC236}">
-                <a16:creationId xmlns:a16="http://schemas.microsoft.com/office/drawing/2014/main" id="{70CFF030-81F6-46FA-948F-C1DA59ACB02F}"/>
+                <a16:creationId xmlns:a16="http://schemas.microsoft.com/office/drawing/2014/main" id="{C8E148AE-54B5-497B-B844-EA98F30191B3}"/>
               </a:ext>
             </a:extLst>
           </p:cNvPr>
-          <p:cNvSpPr txBox="1"/>
-          <p:nvPr/>
-        </p:nvSpPr>
-        <p:spPr>
-          <a:xfrm>
-            <a:off x="4268073" y="2814149"/>
-            <a:ext cx="1258679" cy="369332"/>
-          </a:xfrm>
-          <a:prstGeom prst="rect">
-            <a:avLst/>
-          </a:prstGeom>
-          <a:noFill/>
-        </p:spPr>
-        <p:txBody>
-          <a:bodyPr wrap="none" rtlCol="0">
-            <a:spAutoFit/>
-          </a:bodyPr>
-          <a:lstStyle/>
-          <a:p>
-            <a:pPr algn="r"/>
-            <a:r>
-              <a:rPr lang="ru-RU" dirty="0"/>
-              <a:t>Картинка</a:t>
-            </a:r>
-          </a:p>
-        </p:txBody>
-      </p:sp>
+          <p:cNvPicPr>
+            <a:picLocks noChangeAspect="1"/>
+          </p:cNvPicPr>
+          <p:nvPr/>
+        </p:nvPicPr>
+        <p:blipFill rotWithShape="1">
+          <a:blip r:embed="rId2"/>
+          <a:srcRect l="14751" r="15447" b="45337"/>
+          <a:stretch/>
+        </p:blipFill>
+        <p:spPr>
+          <a:xfrm>
+            <a:off x="1119908" y="1439333"/>
+            <a:ext cx="9952184" cy="4383951"/>
+          </a:xfrm>
+          <a:prstGeom prst="rect">
+            <a:avLst/>
+          </a:prstGeom>
+        </p:spPr>
+      </p:pic>
     </p:spTree>
     <p:extLst>
       <p:ext uri="{BB962C8B-B14F-4D97-AF65-F5344CB8AC3E}">
-        <p14:creationId xmlns:p14="http://schemas.microsoft.com/office/powerpoint/2010/main" val="1429739427"/>
+        <p14:creationId xmlns:p14="http://schemas.microsoft.com/office/powerpoint/2010/main" val="1270246117"/>
       </p:ext>
     </p:extLst>
   </p:cSld>
@@ -2729,7 +3023,7 @@
               <a:rPr lang="ru-RU" sz="4000" dirty="0">
                 <a:latin typeface="+mj-lt"/>
               </a:rPr>
-              <a:t>Интерфейс и взаимодействие</a:t>
+              <a:t>Основной функционал системы</a:t>
             </a:r>
             <a:endParaRPr sz="4000" dirty="0">
               <a:latin typeface="+mj-lt"/>
@@ -2787,46 +3081,39 @@
           </a:p>
         </p:txBody>
       </p:sp>
-      <p:sp>
-        <p:nvSpPr>
-          <p:cNvPr id="4" name="TextBox 3">
+      <p:pic>
+        <p:nvPicPr>
+          <p:cNvPr id="6" name="Рисунок 5">
             <a:extLst>
               <a:ext uri="{FF2B5EF4-FFF2-40B4-BE49-F238E27FC236}">
-                <a16:creationId xmlns:a16="http://schemas.microsoft.com/office/drawing/2014/main" id="{70CFF030-81F6-46FA-948F-C1DA59ACB02F}"/>
+                <a16:creationId xmlns:a16="http://schemas.microsoft.com/office/drawing/2014/main" id="{536DD314-EF90-44EF-B444-FBAAF34B931C}"/>
               </a:ext>
             </a:extLst>
           </p:cNvPr>
-          <p:cNvSpPr txBox="1"/>
-          <p:nvPr/>
-        </p:nvSpPr>
-        <p:spPr>
-          <a:xfrm>
-            <a:off x="4268073" y="2814149"/>
-            <a:ext cx="1258679" cy="369332"/>
-          </a:xfrm>
-          <a:prstGeom prst="rect">
-            <a:avLst/>
-          </a:prstGeom>
-          <a:noFill/>
-        </p:spPr>
-        <p:txBody>
-          <a:bodyPr wrap="none" rtlCol="0">
-            <a:spAutoFit/>
-          </a:bodyPr>
-          <a:lstStyle/>
-          <a:p>
-            <a:pPr algn="r"/>
-            <a:r>
-              <a:rPr lang="ru-RU" dirty="0"/>
-              <a:t>Картинка</a:t>
-            </a:r>
-          </a:p>
-        </p:txBody>
-      </p:sp>
+          <p:cNvPicPr>
+            <a:picLocks noChangeAspect="1"/>
+          </p:cNvPicPr>
+          <p:nvPr/>
+        </p:nvPicPr>
+        <p:blipFill rotWithShape="1">
+          <a:blip r:embed="rId2"/>
+          <a:srcRect l="43395" t="20333" r="1289" b="33723"/>
+          <a:stretch/>
+        </p:blipFill>
+        <p:spPr>
+          <a:xfrm>
+            <a:off x="1714615" y="1642533"/>
+            <a:ext cx="9006868" cy="4207934"/>
+          </a:xfrm>
+          <a:prstGeom prst="rect">
+            <a:avLst/>
+          </a:prstGeom>
+        </p:spPr>
+      </p:pic>
     </p:spTree>
     <p:extLst>
       <p:ext uri="{BB962C8B-B14F-4D97-AF65-F5344CB8AC3E}">
-        <p14:creationId xmlns:p14="http://schemas.microsoft.com/office/powerpoint/2010/main" val="1323784328"/>
+        <p14:creationId xmlns:p14="http://schemas.microsoft.com/office/powerpoint/2010/main" val="1829870538"/>
       </p:ext>
     </p:extLst>
   </p:cSld>
@@ -2839,6 +3126,14 @@
 <file path=ppt/slides/slide17.xml><?xml version="1.0" encoding="utf-8"?>
 <p:sld xmlns:a="http://schemas.openxmlformats.org/drawingml/2006/main" xmlns:r="http://schemas.openxmlformats.org/officeDocument/2006/relationships" xmlns:p="http://schemas.openxmlformats.org/presentationml/2006/main">
   <p:cSld>
+    <p:bg>
+      <p:bgPr>
+        <a:solidFill>
+          <a:schemeClr val="bg1"/>
+        </a:solidFill>
+        <a:effectLst/>
+      </p:bgPr>
+    </p:bg>
     <p:spTree>
       <p:nvGrpSpPr>
         <p:cNvPr id="1" name=""/>
@@ -2934,7 +3229,7 @@
               <a:rPr lang="ru-RU" sz="4000" dirty="0">
                 <a:latin typeface="+mj-lt"/>
               </a:rPr>
-              <a:t>Интерфейс и взаимодействие</a:t>
+              <a:t>Основной функционал системы</a:t>
             </a:r>
             <a:endParaRPr sz="4000" dirty="0">
               <a:latin typeface="+mj-lt"/>
@@ -2992,46 +3287,39 @@
           </a:p>
         </p:txBody>
       </p:sp>
-      <p:sp>
-        <p:nvSpPr>
-          <p:cNvPr id="4" name="TextBox 3">
+      <p:pic>
+        <p:nvPicPr>
+          <p:cNvPr id="6" name="Рисунок 5">
             <a:extLst>
               <a:ext uri="{FF2B5EF4-FFF2-40B4-BE49-F238E27FC236}">
-                <a16:creationId xmlns:a16="http://schemas.microsoft.com/office/drawing/2014/main" id="{70CFF030-81F6-46FA-948F-C1DA59ACB02F}"/>
+                <a16:creationId xmlns:a16="http://schemas.microsoft.com/office/drawing/2014/main" id="{649B6907-F09E-4EB8-93CB-495EAA53E21D}"/>
               </a:ext>
             </a:extLst>
           </p:cNvPr>
-          <p:cNvSpPr txBox="1"/>
-          <p:nvPr/>
-        </p:nvSpPr>
-        <p:spPr>
-          <a:xfrm>
-            <a:off x="4268073" y="2814149"/>
-            <a:ext cx="1258679" cy="369332"/>
-          </a:xfrm>
-          <a:prstGeom prst="rect">
-            <a:avLst/>
-          </a:prstGeom>
-          <a:noFill/>
-        </p:spPr>
-        <p:txBody>
-          <a:bodyPr wrap="none" rtlCol="0">
-            <a:spAutoFit/>
-          </a:bodyPr>
-          <a:lstStyle/>
-          <a:p>
-            <a:pPr algn="r"/>
-            <a:r>
-              <a:rPr lang="ru-RU" dirty="0"/>
-              <a:t>Картинка</a:t>
-            </a:r>
-          </a:p>
-        </p:txBody>
-      </p:sp>
+          <p:cNvPicPr>
+            <a:picLocks noChangeAspect="1"/>
+          </p:cNvPicPr>
+          <p:nvPr/>
+        </p:nvPicPr>
+        <p:blipFill rotWithShape="1">
+          <a:blip r:embed="rId2"/>
+          <a:srcRect l="14436" r="15009" b="39587"/>
+          <a:stretch/>
+        </p:blipFill>
+        <p:spPr>
+          <a:xfrm>
+            <a:off x="1371994" y="1355168"/>
+            <a:ext cx="9447706" cy="4550448"/>
+          </a:xfrm>
+          <a:prstGeom prst="rect">
+            <a:avLst/>
+          </a:prstGeom>
+        </p:spPr>
+      </p:pic>
     </p:spTree>
     <p:extLst>
       <p:ext uri="{BB962C8B-B14F-4D97-AF65-F5344CB8AC3E}">
-        <p14:creationId xmlns:p14="http://schemas.microsoft.com/office/powerpoint/2010/main" val="2610129038"/>
+        <p14:creationId xmlns:p14="http://schemas.microsoft.com/office/powerpoint/2010/main" val="4169047097"/>
       </p:ext>
     </p:extLst>
   </p:cSld>
@@ -3044,6 +3332,14 @@
 <file path=ppt/slides/slide18.xml><?xml version="1.0" encoding="utf-8"?>
 <p:sld xmlns:a="http://schemas.openxmlformats.org/drawingml/2006/main" xmlns:r="http://schemas.openxmlformats.org/officeDocument/2006/relationships" xmlns:p="http://schemas.openxmlformats.org/presentationml/2006/main">
   <p:cSld>
+    <p:bg>
+      <p:bgPr>
+        <a:solidFill>
+          <a:schemeClr val="bg1"/>
+        </a:solidFill>
+        <a:effectLst/>
+      </p:bgPr>
+    </p:bg>
     <p:spTree>
       <p:nvGrpSpPr>
         <p:cNvPr id="1" name=""/>
@@ -3139,7 +3435,7 @@
               <a:rPr lang="ru-RU" sz="4000" dirty="0">
                 <a:latin typeface="+mj-lt"/>
               </a:rPr>
-              <a:t>Интерфейс и взаимодействие</a:t>
+              <a:t>Основной функционал системы</a:t>
             </a:r>
             <a:endParaRPr sz="4000" dirty="0">
               <a:latin typeface="+mj-lt"/>
@@ -3197,46 +3493,39 @@
           </a:p>
         </p:txBody>
       </p:sp>
-      <p:sp>
-        <p:nvSpPr>
-          <p:cNvPr id="4" name="TextBox 3">
+      <p:pic>
+        <p:nvPicPr>
+          <p:cNvPr id="6" name="Рисунок 5">
             <a:extLst>
               <a:ext uri="{FF2B5EF4-FFF2-40B4-BE49-F238E27FC236}">
-                <a16:creationId xmlns:a16="http://schemas.microsoft.com/office/drawing/2014/main" id="{70CFF030-81F6-46FA-948F-C1DA59ACB02F}"/>
+                <a16:creationId xmlns:a16="http://schemas.microsoft.com/office/drawing/2014/main" id="{40CECADC-6FCB-40A3-B373-C45B265C25B0}"/>
               </a:ext>
             </a:extLst>
           </p:cNvPr>
-          <p:cNvSpPr txBox="1"/>
-          <p:nvPr/>
-        </p:nvSpPr>
-        <p:spPr>
-          <a:xfrm>
-            <a:off x="4268073" y="2814149"/>
-            <a:ext cx="1258679" cy="369332"/>
-          </a:xfrm>
-          <a:prstGeom prst="rect">
-            <a:avLst/>
-          </a:prstGeom>
-          <a:noFill/>
-        </p:spPr>
-        <p:txBody>
-          <a:bodyPr wrap="none" rtlCol="0">
-            <a:spAutoFit/>
-          </a:bodyPr>
-          <a:lstStyle/>
-          <a:p>
-            <a:pPr algn="r"/>
-            <a:r>
-              <a:rPr lang="ru-RU" dirty="0"/>
-              <a:t>Картинка</a:t>
-            </a:r>
-          </a:p>
-        </p:txBody>
-      </p:sp>
+          <p:cNvPicPr>
+            <a:picLocks noChangeAspect="1"/>
+          </p:cNvPicPr>
+          <p:nvPr/>
+        </p:nvPicPr>
+        <p:blipFill rotWithShape="1">
+          <a:blip r:embed="rId2"/>
+          <a:srcRect l="14722" t="18643" r="15764" b="17407"/>
+          <a:stretch/>
+        </p:blipFill>
+        <p:spPr>
+          <a:xfrm>
+            <a:off x="1555597" y="1355593"/>
+            <a:ext cx="9080499" cy="4699000"/>
+          </a:xfrm>
+          <a:prstGeom prst="rect">
+            <a:avLst/>
+          </a:prstGeom>
+        </p:spPr>
+      </p:pic>
     </p:spTree>
     <p:extLst>
       <p:ext uri="{BB962C8B-B14F-4D97-AF65-F5344CB8AC3E}">
-        <p14:creationId xmlns:p14="http://schemas.microsoft.com/office/powerpoint/2010/main" val="137830022"/>
+        <p14:creationId xmlns:p14="http://schemas.microsoft.com/office/powerpoint/2010/main" val="4160481848"/>
       </p:ext>
     </p:extLst>
   </p:cSld>
@@ -3344,7 +3633,7 @@
               <a:rPr lang="ru-RU" sz="4000" dirty="0">
                 <a:latin typeface="+mj-lt"/>
               </a:rPr>
-              <a:t>Интерфейс и взаимодействие</a:t>
+              <a:t>Основной функционал системы</a:t>
             </a:r>
             <a:endParaRPr sz="4000" dirty="0">
               <a:latin typeface="+mj-lt"/>
@@ -3416,8 +3705,8 @@
         </p:nvSpPr>
         <p:spPr>
           <a:xfrm>
-            <a:off x="4268073" y="2814149"/>
-            <a:ext cx="1258679" cy="369332"/>
+            <a:off x="3799384" y="3244334"/>
+            <a:ext cx="4592925" cy="369332"/>
           </a:xfrm>
           <a:prstGeom prst="rect">
             <a:avLst/>
@@ -3433,7 +3722,15 @@
             <a:pPr algn="r"/>
             <a:r>
               <a:rPr lang="ru-RU" dirty="0"/>
-              <a:t>Картинка</a:t>
+              <a:t>Картинка с открытым </a:t>
+            </a:r>
+            <a:r>
+              <a:rPr lang="en-US" dirty="0"/>
+              <a:t>PDF-</a:t>
+            </a:r>
+            <a:r>
+              <a:rPr lang="ru-RU" dirty="0"/>
+              <a:t>документом</a:t>
             </a:r>
           </a:p>
         </p:txBody>
@@ -3441,7 +3738,7 @@
     </p:spTree>
     <p:extLst>
       <p:ext uri="{BB962C8B-B14F-4D97-AF65-F5344CB8AC3E}">
-        <p14:creationId xmlns:p14="http://schemas.microsoft.com/office/powerpoint/2010/main" val="1168555204"/>
+        <p14:creationId xmlns:p14="http://schemas.microsoft.com/office/powerpoint/2010/main" val="3698923561"/>
       </p:ext>
     </p:extLst>
   </p:cSld>
@@ -3533,7 +3830,7 @@
         </p:nvSpPr>
         <p:spPr>
           <a:xfrm>
-            <a:off x="4050095" y="148977"/>
+            <a:off x="4050095" y="154021"/>
             <a:ext cx="4091504" cy="707886"/>
           </a:xfrm>
           <a:prstGeom prst="rect">
@@ -4596,6 +4893,851 @@
         </p:txBody>
       </p:sp>
     </p:spTree>
+  </p:cSld>
+  <p:clrMapOvr>
+    <a:masterClrMapping/>
+  </p:clrMapOvr>
+</p:sld>
+</file>
+
+<file path=ppt/slides/slide20.xml><?xml version="1.0" encoding="utf-8"?>
+<p:sld xmlns:a="http://schemas.openxmlformats.org/drawingml/2006/main" xmlns:r="http://schemas.openxmlformats.org/officeDocument/2006/relationships" xmlns:p="http://schemas.openxmlformats.org/presentationml/2006/main">
+  <p:cSld>
+    <p:spTree>
+      <p:nvGrpSpPr>
+        <p:cNvPr id="1" name=""/>
+        <p:cNvGrpSpPr/>
+        <p:nvPr/>
+      </p:nvGrpSpPr>
+      <p:grpSpPr>
+        <a:xfrm>
+          <a:off x="0" y="0"/>
+          <a:ext cx="0" cy="0"/>
+          <a:chOff x="0" y="0"/>
+          <a:chExt cx="0" cy="0"/>
+        </a:xfrm>
+      </p:grpSpPr>
+      <p:sp>
+        <p:nvSpPr>
+          <p:cNvPr id="2" name="Rectangle 1"/>
+          <p:cNvSpPr/>
+          <p:nvPr/>
+        </p:nvSpPr>
+        <p:spPr>
+          <a:xfrm>
+            <a:off x="0" y="0"/>
+            <a:ext cx="12191695" cy="1005840"/>
+          </a:xfrm>
+          <a:prstGeom prst="rect">
+            <a:avLst/>
+          </a:prstGeom>
+          <a:solidFill>
+            <a:schemeClr val="accent5">
+              <a:lumMod val="75000"/>
+            </a:schemeClr>
+          </a:solidFill>
+          <a:ln>
+            <a:noFill/>
+          </a:ln>
+          <a:effectLst/>
+        </p:spPr>
+        <p:style>
+          <a:lnRef idx="1">
+            <a:schemeClr val="accent1"/>
+          </a:lnRef>
+          <a:fillRef idx="3">
+            <a:schemeClr val="accent1"/>
+          </a:fillRef>
+          <a:effectRef idx="2">
+            <a:schemeClr val="accent1"/>
+          </a:effectRef>
+          <a:fontRef idx="minor">
+            <a:schemeClr val="lt1"/>
+          </a:fontRef>
+        </p:style>
+        <p:txBody>
+          <a:bodyPr rtlCol="0" anchor="ctr"/>
+          <a:lstStyle/>
+          <a:p>
+            <a:pPr algn="ctr"/>
+            <a:endParaRPr/>
+          </a:p>
+        </p:txBody>
+      </p:sp>
+      <p:sp>
+        <p:nvSpPr>
+          <p:cNvPr id="3" name="TextBox 2"/>
+          <p:cNvSpPr txBox="1"/>
+          <p:nvPr/>
+        </p:nvSpPr>
+        <p:spPr>
+          <a:xfrm>
+            <a:off x="2981663" y="148977"/>
+            <a:ext cx="6228368" cy="707886"/>
+          </a:xfrm>
+          <a:prstGeom prst="rect">
+            <a:avLst/>
+          </a:prstGeom>
+          <a:noFill/>
+        </p:spPr>
+        <p:txBody>
+          <a:bodyPr wrap="square">
+            <a:spAutoFit/>
+          </a:bodyPr>
+          <a:lstStyle/>
+          <a:p>
+            <a:pPr algn="l">
+              <a:defRPr sz="2800" b="1">
+                <a:solidFill>
+                  <a:srgbClr val="FFFFFF"/>
+                </a:solidFill>
+                <a:latin typeface="Segoe UI"/>
+              </a:defRPr>
+            </a:pPr>
+            <a:r>
+              <a:rPr lang="ru-RU" sz="4000" dirty="0">
+                <a:latin typeface="+mj-lt"/>
+              </a:rPr>
+              <a:t>Архитектура системы</a:t>
+            </a:r>
+            <a:endParaRPr sz="4000" dirty="0">
+              <a:latin typeface="+mj-lt"/>
+            </a:endParaRPr>
+          </a:p>
+        </p:txBody>
+      </p:sp>
+      <p:sp>
+        <p:nvSpPr>
+          <p:cNvPr id="7" name="Прямоугольник 6"/>
+          <p:cNvSpPr/>
+          <p:nvPr/>
+        </p:nvSpPr>
+        <p:spPr>
+          <a:xfrm>
+            <a:off x="10840870" y="6054593"/>
+            <a:ext cx="686406" cy="369332"/>
+          </a:xfrm>
+          <a:prstGeom prst="rect">
+            <a:avLst/>
+          </a:prstGeom>
+        </p:spPr>
+        <p:txBody>
+          <a:bodyPr wrap="none">
+            <a:spAutoFit/>
+          </a:bodyPr>
+          <a:lstStyle/>
+          <a:p>
+            <a:fld id="{C1FF6DA9-008F-8B48-92A6-B652298478BF}" type="slidenum">
+              <a:rPr lang="en-US" b="1" smtClean="0">
+                <a:latin typeface="Segoe UI" panose="020B0502040204020203" pitchFamily="34" charset="0"/>
+                <a:cs typeface="Segoe UI" panose="020B0502040204020203" pitchFamily="34" charset="0"/>
+              </a:rPr>
+              <a:pPr/>
+              <a:t>20</a:t>
+            </a:fld>
+            <a:r>
+              <a:rPr lang="en-US" b="1" dirty="0">
+                <a:latin typeface="Segoe UI" panose="020B0502040204020203" pitchFamily="34" charset="0"/>
+                <a:cs typeface="Segoe UI" panose="020B0502040204020203" pitchFamily="34" charset="0"/>
+              </a:rPr>
+              <a:t>/2</a:t>
+            </a:r>
+            <a:r>
+              <a:rPr lang="ru-RU" b="1" dirty="0">
+                <a:latin typeface="Segoe UI" panose="020B0502040204020203" pitchFamily="34" charset="0"/>
+                <a:cs typeface="Segoe UI" panose="020B0502040204020203" pitchFamily="34" charset="0"/>
+              </a:rPr>
+              <a:t>6</a:t>
+            </a:r>
+            <a:endParaRPr lang="en-US" b="1" dirty="0">
+              <a:latin typeface="Segoe UI" panose="020B0502040204020203" pitchFamily="34" charset="0"/>
+              <a:cs typeface="Segoe UI" panose="020B0502040204020203" pitchFamily="34" charset="0"/>
+            </a:endParaRPr>
+          </a:p>
+        </p:txBody>
+      </p:sp>
+    </p:spTree>
+    <p:extLst>
+      <p:ext uri="{BB962C8B-B14F-4D97-AF65-F5344CB8AC3E}">
+        <p14:creationId xmlns:p14="http://schemas.microsoft.com/office/powerpoint/2010/main" val="4101915527"/>
+      </p:ext>
+    </p:extLst>
+  </p:cSld>
+  <p:clrMapOvr>
+    <a:masterClrMapping/>
+  </p:clrMapOvr>
+</p:sld>
+</file>
+
+<file path=ppt/slides/slide21.xml><?xml version="1.0" encoding="utf-8"?>
+<p:sld xmlns:a="http://schemas.openxmlformats.org/drawingml/2006/main" xmlns:r="http://schemas.openxmlformats.org/officeDocument/2006/relationships" xmlns:p="http://schemas.openxmlformats.org/presentationml/2006/main">
+  <p:cSld>
+    <p:spTree>
+      <p:nvGrpSpPr>
+        <p:cNvPr id="1" name=""/>
+        <p:cNvGrpSpPr/>
+        <p:nvPr/>
+      </p:nvGrpSpPr>
+      <p:grpSpPr>
+        <a:xfrm>
+          <a:off x="0" y="0"/>
+          <a:ext cx="0" cy="0"/>
+          <a:chOff x="0" y="0"/>
+          <a:chExt cx="0" cy="0"/>
+        </a:xfrm>
+      </p:grpSpPr>
+      <p:sp>
+        <p:nvSpPr>
+          <p:cNvPr id="2" name="Rectangle 1"/>
+          <p:cNvSpPr/>
+          <p:nvPr/>
+        </p:nvSpPr>
+        <p:spPr>
+          <a:xfrm>
+            <a:off x="0" y="0"/>
+            <a:ext cx="12191695" cy="1005840"/>
+          </a:xfrm>
+          <a:prstGeom prst="rect">
+            <a:avLst/>
+          </a:prstGeom>
+          <a:solidFill>
+            <a:schemeClr val="accent5">
+              <a:lumMod val="75000"/>
+            </a:schemeClr>
+          </a:solidFill>
+          <a:ln>
+            <a:noFill/>
+          </a:ln>
+          <a:effectLst/>
+        </p:spPr>
+        <p:style>
+          <a:lnRef idx="1">
+            <a:schemeClr val="accent1"/>
+          </a:lnRef>
+          <a:fillRef idx="3">
+            <a:schemeClr val="accent1"/>
+          </a:fillRef>
+          <a:effectRef idx="2">
+            <a:schemeClr val="accent1"/>
+          </a:effectRef>
+          <a:fontRef idx="minor">
+            <a:schemeClr val="lt1"/>
+          </a:fontRef>
+        </p:style>
+        <p:txBody>
+          <a:bodyPr rtlCol="0" anchor="ctr"/>
+          <a:lstStyle/>
+          <a:p>
+            <a:pPr algn="ctr"/>
+            <a:endParaRPr/>
+          </a:p>
+        </p:txBody>
+      </p:sp>
+      <p:sp>
+        <p:nvSpPr>
+          <p:cNvPr id="3" name="TextBox 2"/>
+          <p:cNvSpPr txBox="1"/>
+          <p:nvPr/>
+        </p:nvSpPr>
+        <p:spPr>
+          <a:xfrm>
+            <a:off x="2981663" y="148977"/>
+            <a:ext cx="6228368" cy="707886"/>
+          </a:xfrm>
+          <a:prstGeom prst="rect">
+            <a:avLst/>
+          </a:prstGeom>
+          <a:noFill/>
+        </p:spPr>
+        <p:txBody>
+          <a:bodyPr wrap="square">
+            <a:spAutoFit/>
+          </a:bodyPr>
+          <a:lstStyle/>
+          <a:p>
+            <a:pPr algn="l">
+              <a:defRPr sz="2800" b="1">
+                <a:solidFill>
+                  <a:srgbClr val="FFFFFF"/>
+                </a:solidFill>
+                <a:latin typeface="Segoe UI"/>
+              </a:defRPr>
+            </a:pPr>
+            <a:r>
+              <a:rPr lang="ru-RU" sz="4000" dirty="0">
+                <a:latin typeface="+mj-lt"/>
+              </a:rPr>
+              <a:t>Архитектура системы</a:t>
+            </a:r>
+            <a:endParaRPr sz="4000" dirty="0">
+              <a:latin typeface="+mj-lt"/>
+            </a:endParaRPr>
+          </a:p>
+        </p:txBody>
+      </p:sp>
+      <p:sp>
+        <p:nvSpPr>
+          <p:cNvPr id="7" name="Прямоугольник 6"/>
+          <p:cNvSpPr/>
+          <p:nvPr/>
+        </p:nvSpPr>
+        <p:spPr>
+          <a:xfrm>
+            <a:off x="10840870" y="6054593"/>
+            <a:ext cx="686406" cy="369332"/>
+          </a:xfrm>
+          <a:prstGeom prst="rect">
+            <a:avLst/>
+          </a:prstGeom>
+        </p:spPr>
+        <p:txBody>
+          <a:bodyPr wrap="none">
+            <a:spAutoFit/>
+          </a:bodyPr>
+          <a:lstStyle/>
+          <a:p>
+            <a:fld id="{C1FF6DA9-008F-8B48-92A6-B652298478BF}" type="slidenum">
+              <a:rPr lang="en-US" b="1" smtClean="0">
+                <a:latin typeface="Segoe UI" panose="020B0502040204020203" pitchFamily="34" charset="0"/>
+                <a:cs typeface="Segoe UI" panose="020B0502040204020203" pitchFamily="34" charset="0"/>
+              </a:rPr>
+              <a:pPr/>
+              <a:t>21</a:t>
+            </a:fld>
+            <a:r>
+              <a:rPr lang="en-US" b="1" dirty="0">
+                <a:latin typeface="Segoe UI" panose="020B0502040204020203" pitchFamily="34" charset="0"/>
+                <a:cs typeface="Segoe UI" panose="020B0502040204020203" pitchFamily="34" charset="0"/>
+              </a:rPr>
+              <a:t>/2</a:t>
+            </a:r>
+            <a:r>
+              <a:rPr lang="ru-RU" b="1" dirty="0">
+                <a:latin typeface="Segoe UI" panose="020B0502040204020203" pitchFamily="34" charset="0"/>
+                <a:cs typeface="Segoe UI" panose="020B0502040204020203" pitchFamily="34" charset="0"/>
+              </a:rPr>
+              <a:t>6</a:t>
+            </a:r>
+            <a:endParaRPr lang="en-US" b="1" dirty="0">
+              <a:latin typeface="Segoe UI" panose="020B0502040204020203" pitchFamily="34" charset="0"/>
+              <a:cs typeface="Segoe UI" panose="020B0502040204020203" pitchFamily="34" charset="0"/>
+            </a:endParaRPr>
+          </a:p>
+        </p:txBody>
+      </p:sp>
+    </p:spTree>
+    <p:extLst>
+      <p:ext uri="{BB962C8B-B14F-4D97-AF65-F5344CB8AC3E}">
+        <p14:creationId xmlns:p14="http://schemas.microsoft.com/office/powerpoint/2010/main" val="3025341015"/>
+      </p:ext>
+    </p:extLst>
+  </p:cSld>
+  <p:clrMapOvr>
+    <a:masterClrMapping/>
+  </p:clrMapOvr>
+</p:sld>
+</file>
+
+<file path=ppt/slides/slide22.xml><?xml version="1.0" encoding="utf-8"?>
+<p:sld xmlns:a="http://schemas.openxmlformats.org/drawingml/2006/main" xmlns:r="http://schemas.openxmlformats.org/officeDocument/2006/relationships" xmlns:p="http://schemas.openxmlformats.org/presentationml/2006/main">
+  <p:cSld>
+    <p:spTree>
+      <p:nvGrpSpPr>
+        <p:cNvPr id="1" name=""/>
+        <p:cNvGrpSpPr/>
+        <p:nvPr/>
+      </p:nvGrpSpPr>
+      <p:grpSpPr>
+        <a:xfrm>
+          <a:off x="0" y="0"/>
+          <a:ext cx="0" cy="0"/>
+          <a:chOff x="0" y="0"/>
+          <a:chExt cx="0" cy="0"/>
+        </a:xfrm>
+      </p:grpSpPr>
+      <p:sp>
+        <p:nvSpPr>
+          <p:cNvPr id="2" name="Rectangle 1"/>
+          <p:cNvSpPr/>
+          <p:nvPr/>
+        </p:nvSpPr>
+        <p:spPr>
+          <a:xfrm>
+            <a:off x="0" y="0"/>
+            <a:ext cx="12191695" cy="1005840"/>
+          </a:xfrm>
+          <a:prstGeom prst="rect">
+            <a:avLst/>
+          </a:prstGeom>
+          <a:solidFill>
+            <a:schemeClr val="accent5">
+              <a:lumMod val="75000"/>
+            </a:schemeClr>
+          </a:solidFill>
+          <a:ln>
+            <a:noFill/>
+          </a:ln>
+          <a:effectLst/>
+        </p:spPr>
+        <p:style>
+          <a:lnRef idx="1">
+            <a:schemeClr val="accent1"/>
+          </a:lnRef>
+          <a:fillRef idx="3">
+            <a:schemeClr val="accent1"/>
+          </a:fillRef>
+          <a:effectRef idx="2">
+            <a:schemeClr val="accent1"/>
+          </a:effectRef>
+          <a:fontRef idx="minor">
+            <a:schemeClr val="lt1"/>
+          </a:fontRef>
+        </p:style>
+        <p:txBody>
+          <a:bodyPr rtlCol="0" anchor="ctr"/>
+          <a:lstStyle/>
+          <a:p>
+            <a:pPr algn="ctr"/>
+            <a:endParaRPr/>
+          </a:p>
+        </p:txBody>
+      </p:sp>
+      <p:sp>
+        <p:nvSpPr>
+          <p:cNvPr id="3" name="TextBox 2"/>
+          <p:cNvSpPr txBox="1"/>
+          <p:nvPr/>
+        </p:nvSpPr>
+        <p:spPr>
+          <a:xfrm>
+            <a:off x="2981663" y="148977"/>
+            <a:ext cx="6228368" cy="707886"/>
+          </a:xfrm>
+          <a:prstGeom prst="rect">
+            <a:avLst/>
+          </a:prstGeom>
+          <a:noFill/>
+        </p:spPr>
+        <p:txBody>
+          <a:bodyPr wrap="square">
+            <a:spAutoFit/>
+          </a:bodyPr>
+          <a:lstStyle/>
+          <a:p>
+            <a:pPr algn="l">
+              <a:defRPr sz="2800" b="1">
+                <a:solidFill>
+                  <a:srgbClr val="FFFFFF"/>
+                </a:solidFill>
+                <a:latin typeface="Segoe UI"/>
+              </a:defRPr>
+            </a:pPr>
+            <a:r>
+              <a:rPr lang="ru-RU" sz="4000" dirty="0">
+                <a:latin typeface="+mj-lt"/>
+              </a:rPr>
+              <a:t>Архитектура системы</a:t>
+            </a:r>
+            <a:endParaRPr sz="4000" dirty="0">
+              <a:latin typeface="+mj-lt"/>
+            </a:endParaRPr>
+          </a:p>
+        </p:txBody>
+      </p:sp>
+      <p:sp>
+        <p:nvSpPr>
+          <p:cNvPr id="7" name="Прямоугольник 6"/>
+          <p:cNvSpPr/>
+          <p:nvPr/>
+        </p:nvSpPr>
+        <p:spPr>
+          <a:xfrm>
+            <a:off x="10840870" y="6054593"/>
+            <a:ext cx="686406" cy="369332"/>
+          </a:xfrm>
+          <a:prstGeom prst="rect">
+            <a:avLst/>
+          </a:prstGeom>
+        </p:spPr>
+        <p:txBody>
+          <a:bodyPr wrap="none">
+            <a:spAutoFit/>
+          </a:bodyPr>
+          <a:lstStyle/>
+          <a:p>
+            <a:fld id="{C1FF6DA9-008F-8B48-92A6-B652298478BF}" type="slidenum">
+              <a:rPr lang="en-US" b="1" smtClean="0">
+                <a:latin typeface="Segoe UI" panose="020B0502040204020203" pitchFamily="34" charset="0"/>
+                <a:cs typeface="Segoe UI" panose="020B0502040204020203" pitchFamily="34" charset="0"/>
+              </a:rPr>
+              <a:pPr/>
+              <a:t>22</a:t>
+            </a:fld>
+            <a:r>
+              <a:rPr lang="en-US" b="1" dirty="0">
+                <a:latin typeface="Segoe UI" panose="020B0502040204020203" pitchFamily="34" charset="0"/>
+                <a:cs typeface="Segoe UI" panose="020B0502040204020203" pitchFamily="34" charset="0"/>
+              </a:rPr>
+              <a:t>/2</a:t>
+            </a:r>
+            <a:r>
+              <a:rPr lang="ru-RU" b="1" dirty="0">
+                <a:latin typeface="Segoe UI" panose="020B0502040204020203" pitchFamily="34" charset="0"/>
+                <a:cs typeface="Segoe UI" panose="020B0502040204020203" pitchFamily="34" charset="0"/>
+              </a:rPr>
+              <a:t>6</a:t>
+            </a:r>
+            <a:endParaRPr lang="en-US" b="1" dirty="0">
+              <a:latin typeface="Segoe UI" panose="020B0502040204020203" pitchFamily="34" charset="0"/>
+              <a:cs typeface="Segoe UI" panose="020B0502040204020203" pitchFamily="34" charset="0"/>
+            </a:endParaRPr>
+          </a:p>
+        </p:txBody>
+      </p:sp>
+    </p:spTree>
+    <p:extLst>
+      <p:ext uri="{BB962C8B-B14F-4D97-AF65-F5344CB8AC3E}">
+        <p14:creationId xmlns:p14="http://schemas.microsoft.com/office/powerpoint/2010/main" val="936643360"/>
+      </p:ext>
+    </p:extLst>
+  </p:cSld>
+  <p:clrMapOvr>
+    <a:masterClrMapping/>
+  </p:clrMapOvr>
+</p:sld>
+</file>
+
+<file path=ppt/slides/slide23.xml><?xml version="1.0" encoding="utf-8"?>
+<p:sld xmlns:a="http://schemas.openxmlformats.org/drawingml/2006/main" xmlns:r="http://schemas.openxmlformats.org/officeDocument/2006/relationships" xmlns:p="http://schemas.openxmlformats.org/presentationml/2006/main">
+  <p:cSld>
+    <p:spTree>
+      <p:nvGrpSpPr>
+        <p:cNvPr id="1" name=""/>
+        <p:cNvGrpSpPr/>
+        <p:nvPr/>
+      </p:nvGrpSpPr>
+      <p:grpSpPr>
+        <a:xfrm>
+          <a:off x="0" y="0"/>
+          <a:ext cx="0" cy="0"/>
+          <a:chOff x="0" y="0"/>
+          <a:chExt cx="0" cy="0"/>
+        </a:xfrm>
+      </p:grpSpPr>
+      <p:sp>
+        <p:nvSpPr>
+          <p:cNvPr id="2" name="Rectangle 1"/>
+          <p:cNvSpPr/>
+          <p:nvPr/>
+        </p:nvSpPr>
+        <p:spPr>
+          <a:xfrm>
+            <a:off x="0" y="0"/>
+            <a:ext cx="12191695" cy="1005840"/>
+          </a:xfrm>
+          <a:prstGeom prst="rect">
+            <a:avLst/>
+          </a:prstGeom>
+          <a:solidFill>
+            <a:schemeClr val="accent5">
+              <a:lumMod val="75000"/>
+            </a:schemeClr>
+          </a:solidFill>
+          <a:ln>
+            <a:noFill/>
+          </a:ln>
+          <a:effectLst/>
+        </p:spPr>
+        <p:style>
+          <a:lnRef idx="1">
+            <a:schemeClr val="accent1"/>
+          </a:lnRef>
+          <a:fillRef idx="3">
+            <a:schemeClr val="accent1"/>
+          </a:fillRef>
+          <a:effectRef idx="2">
+            <a:schemeClr val="accent1"/>
+          </a:effectRef>
+          <a:fontRef idx="minor">
+            <a:schemeClr val="lt1"/>
+          </a:fontRef>
+        </p:style>
+        <p:txBody>
+          <a:bodyPr rtlCol="0" anchor="ctr"/>
+          <a:lstStyle/>
+          <a:p>
+            <a:pPr algn="ctr"/>
+            <a:endParaRPr/>
+          </a:p>
+        </p:txBody>
+      </p:sp>
+      <p:sp>
+        <p:nvSpPr>
+          <p:cNvPr id="3" name="TextBox 2"/>
+          <p:cNvSpPr txBox="1"/>
+          <p:nvPr/>
+        </p:nvSpPr>
+        <p:spPr>
+          <a:xfrm>
+            <a:off x="2981663" y="148977"/>
+            <a:ext cx="6228368" cy="707886"/>
+          </a:xfrm>
+          <a:prstGeom prst="rect">
+            <a:avLst/>
+          </a:prstGeom>
+          <a:noFill/>
+        </p:spPr>
+        <p:txBody>
+          <a:bodyPr wrap="square">
+            <a:spAutoFit/>
+          </a:bodyPr>
+          <a:lstStyle/>
+          <a:p>
+            <a:pPr algn="l">
+              <a:defRPr sz="2800" b="1">
+                <a:solidFill>
+                  <a:srgbClr val="FFFFFF"/>
+                </a:solidFill>
+                <a:latin typeface="Segoe UI"/>
+              </a:defRPr>
+            </a:pPr>
+            <a:r>
+              <a:rPr lang="ru-RU" sz="4000" dirty="0">
+                <a:latin typeface="+mj-lt"/>
+              </a:rPr>
+              <a:t>Архитектура системы</a:t>
+            </a:r>
+            <a:endParaRPr sz="4000" dirty="0">
+              <a:latin typeface="+mj-lt"/>
+            </a:endParaRPr>
+          </a:p>
+        </p:txBody>
+      </p:sp>
+      <p:sp>
+        <p:nvSpPr>
+          <p:cNvPr id="7" name="Прямоугольник 6"/>
+          <p:cNvSpPr/>
+          <p:nvPr/>
+        </p:nvSpPr>
+        <p:spPr>
+          <a:xfrm>
+            <a:off x="10840870" y="6054593"/>
+            <a:ext cx="686406" cy="369332"/>
+          </a:xfrm>
+          <a:prstGeom prst="rect">
+            <a:avLst/>
+          </a:prstGeom>
+        </p:spPr>
+        <p:txBody>
+          <a:bodyPr wrap="none">
+            <a:spAutoFit/>
+          </a:bodyPr>
+          <a:lstStyle/>
+          <a:p>
+            <a:fld id="{C1FF6DA9-008F-8B48-92A6-B652298478BF}" type="slidenum">
+              <a:rPr lang="en-US" b="1" smtClean="0">
+                <a:latin typeface="Segoe UI" panose="020B0502040204020203" pitchFamily="34" charset="0"/>
+                <a:cs typeface="Segoe UI" panose="020B0502040204020203" pitchFamily="34" charset="0"/>
+              </a:rPr>
+              <a:pPr/>
+              <a:t>23</a:t>
+            </a:fld>
+            <a:r>
+              <a:rPr lang="en-US" b="1" dirty="0">
+                <a:latin typeface="Segoe UI" panose="020B0502040204020203" pitchFamily="34" charset="0"/>
+                <a:cs typeface="Segoe UI" panose="020B0502040204020203" pitchFamily="34" charset="0"/>
+              </a:rPr>
+              <a:t>/2</a:t>
+            </a:r>
+            <a:r>
+              <a:rPr lang="ru-RU" b="1" dirty="0">
+                <a:latin typeface="Segoe UI" panose="020B0502040204020203" pitchFamily="34" charset="0"/>
+                <a:cs typeface="Segoe UI" panose="020B0502040204020203" pitchFamily="34" charset="0"/>
+              </a:rPr>
+              <a:t>6</a:t>
+            </a:r>
+            <a:endParaRPr lang="en-US" b="1" dirty="0">
+              <a:latin typeface="Segoe UI" panose="020B0502040204020203" pitchFamily="34" charset="0"/>
+              <a:cs typeface="Segoe UI" panose="020B0502040204020203" pitchFamily="34" charset="0"/>
+            </a:endParaRPr>
+          </a:p>
+        </p:txBody>
+      </p:sp>
+    </p:spTree>
+    <p:extLst>
+      <p:ext uri="{BB962C8B-B14F-4D97-AF65-F5344CB8AC3E}">
+        <p14:creationId xmlns:p14="http://schemas.microsoft.com/office/powerpoint/2010/main" val="1867393232"/>
+      </p:ext>
+    </p:extLst>
+  </p:cSld>
+  <p:clrMapOvr>
+    <a:masterClrMapping/>
+  </p:clrMapOvr>
+</p:sld>
+</file>
+
+<file path=ppt/slides/slide24.xml><?xml version="1.0" encoding="utf-8"?>
+<p:sld xmlns:a="http://schemas.openxmlformats.org/drawingml/2006/main" xmlns:r="http://schemas.openxmlformats.org/officeDocument/2006/relationships" xmlns:p="http://schemas.openxmlformats.org/presentationml/2006/main">
+  <p:cSld>
+    <p:spTree>
+      <p:nvGrpSpPr>
+        <p:cNvPr id="1" name=""/>
+        <p:cNvGrpSpPr/>
+        <p:nvPr/>
+      </p:nvGrpSpPr>
+      <p:grpSpPr>
+        <a:xfrm>
+          <a:off x="0" y="0"/>
+          <a:ext cx="0" cy="0"/>
+          <a:chOff x="0" y="0"/>
+          <a:chExt cx="0" cy="0"/>
+        </a:xfrm>
+      </p:grpSpPr>
+      <p:sp>
+        <p:nvSpPr>
+          <p:cNvPr id="2" name="Rectangle 1"/>
+          <p:cNvSpPr/>
+          <p:nvPr/>
+        </p:nvSpPr>
+        <p:spPr>
+          <a:xfrm>
+            <a:off x="0" y="0"/>
+            <a:ext cx="12191695" cy="1005840"/>
+          </a:xfrm>
+          <a:prstGeom prst="rect">
+            <a:avLst/>
+          </a:prstGeom>
+          <a:solidFill>
+            <a:schemeClr val="accent5">
+              <a:lumMod val="75000"/>
+            </a:schemeClr>
+          </a:solidFill>
+          <a:ln>
+            <a:noFill/>
+          </a:ln>
+          <a:effectLst/>
+        </p:spPr>
+        <p:style>
+          <a:lnRef idx="1">
+            <a:schemeClr val="accent1"/>
+          </a:lnRef>
+          <a:fillRef idx="3">
+            <a:schemeClr val="accent1"/>
+          </a:fillRef>
+          <a:effectRef idx="2">
+            <a:schemeClr val="accent1"/>
+          </a:effectRef>
+          <a:fontRef idx="minor">
+            <a:schemeClr val="lt1"/>
+          </a:fontRef>
+        </p:style>
+        <p:txBody>
+          <a:bodyPr rtlCol="0" anchor="ctr"/>
+          <a:lstStyle/>
+          <a:p>
+            <a:pPr algn="ctr"/>
+            <a:endParaRPr/>
+          </a:p>
+        </p:txBody>
+      </p:sp>
+      <p:sp>
+        <p:nvSpPr>
+          <p:cNvPr id="3" name="TextBox 2"/>
+          <p:cNvSpPr txBox="1"/>
+          <p:nvPr/>
+        </p:nvSpPr>
+        <p:spPr>
+          <a:xfrm>
+            <a:off x="2981663" y="148977"/>
+            <a:ext cx="6228368" cy="707886"/>
+          </a:xfrm>
+          <a:prstGeom prst="rect">
+            <a:avLst/>
+          </a:prstGeom>
+          <a:noFill/>
+        </p:spPr>
+        <p:txBody>
+          <a:bodyPr wrap="square">
+            <a:spAutoFit/>
+          </a:bodyPr>
+          <a:lstStyle/>
+          <a:p>
+            <a:pPr algn="l">
+              <a:defRPr sz="2800" b="1">
+                <a:solidFill>
+                  <a:srgbClr val="FFFFFF"/>
+                </a:solidFill>
+                <a:latin typeface="Segoe UI"/>
+              </a:defRPr>
+            </a:pPr>
+            <a:r>
+              <a:rPr lang="ru-RU" sz="4000" dirty="0">
+                <a:latin typeface="+mj-lt"/>
+              </a:rPr>
+              <a:t>Архитектура системы</a:t>
+            </a:r>
+            <a:endParaRPr sz="4000" dirty="0">
+              <a:latin typeface="+mj-lt"/>
+            </a:endParaRPr>
+          </a:p>
+        </p:txBody>
+      </p:sp>
+      <p:sp>
+        <p:nvSpPr>
+          <p:cNvPr id="7" name="Прямоугольник 6"/>
+          <p:cNvSpPr/>
+          <p:nvPr/>
+        </p:nvSpPr>
+        <p:spPr>
+          <a:xfrm>
+            <a:off x="10840870" y="6054593"/>
+            <a:ext cx="686406" cy="369332"/>
+          </a:xfrm>
+          <a:prstGeom prst="rect">
+            <a:avLst/>
+          </a:prstGeom>
+        </p:spPr>
+        <p:txBody>
+          <a:bodyPr wrap="none">
+            <a:spAutoFit/>
+          </a:bodyPr>
+          <a:lstStyle/>
+          <a:p>
+            <a:fld id="{C1FF6DA9-008F-8B48-92A6-B652298478BF}" type="slidenum">
+              <a:rPr lang="en-US" b="1" smtClean="0">
+                <a:latin typeface="Segoe UI" panose="020B0502040204020203" pitchFamily="34" charset="0"/>
+                <a:cs typeface="Segoe UI" panose="020B0502040204020203" pitchFamily="34" charset="0"/>
+              </a:rPr>
+              <a:pPr/>
+              <a:t>24</a:t>
+            </a:fld>
+            <a:r>
+              <a:rPr lang="en-US" b="1" dirty="0">
+                <a:latin typeface="Segoe UI" panose="020B0502040204020203" pitchFamily="34" charset="0"/>
+                <a:cs typeface="Segoe UI" panose="020B0502040204020203" pitchFamily="34" charset="0"/>
+              </a:rPr>
+              <a:t>/2</a:t>
+            </a:r>
+            <a:r>
+              <a:rPr lang="ru-RU" b="1" dirty="0">
+                <a:latin typeface="Segoe UI" panose="020B0502040204020203" pitchFamily="34" charset="0"/>
+                <a:cs typeface="Segoe UI" panose="020B0502040204020203" pitchFamily="34" charset="0"/>
+              </a:rPr>
+              <a:t>6</a:t>
+            </a:r>
+            <a:endParaRPr lang="en-US" b="1" dirty="0">
+              <a:latin typeface="Segoe UI" panose="020B0502040204020203" pitchFamily="34" charset="0"/>
+              <a:cs typeface="Segoe UI" panose="020B0502040204020203" pitchFamily="34" charset="0"/>
+            </a:endParaRPr>
+          </a:p>
+        </p:txBody>
+      </p:sp>
+    </p:spTree>
+    <p:extLst>
+      <p:ext uri="{BB962C8B-B14F-4D97-AF65-F5344CB8AC3E}">
+        <p14:creationId xmlns:p14="http://schemas.microsoft.com/office/powerpoint/2010/main" val="3765663205"/>
+      </p:ext>
+    </p:extLst>
   </p:cSld>
   <p:clrMapOvr>
     <a:masterClrMapping/>
@@ -4609,9 +5751,7 @@
     <p:bg>
       <p:bgPr>
         <a:solidFill>
-          <a:schemeClr val="bg1">
-            <a:lumMod val="95000"/>
-          </a:schemeClr>
+          <a:schemeClr val="bg1"/>
         </a:solidFill>
         <a:effectLst/>
       </p:bgPr>
@@ -4685,8 +5825,8 @@
         </p:nvSpPr>
         <p:spPr>
           <a:xfrm>
-            <a:off x="4002821" y="148977"/>
-            <a:ext cx="4486488" cy="707886"/>
+            <a:off x="3437149" y="149879"/>
+            <a:ext cx="5317396" cy="707886"/>
           </a:xfrm>
           <a:prstGeom prst="rect">
             <a:avLst/>
@@ -4711,308 +5851,10 @@
               <a:rPr lang="ru-RU" sz="4000" dirty="0">
                 <a:latin typeface="+mj-lt"/>
               </a:rPr>
-              <a:t>Цели и задачи</a:t>
+              <a:t>Путь пользователя</a:t>
             </a:r>
             <a:endParaRPr sz="4000" dirty="0">
               <a:latin typeface="+mj-lt"/>
-            </a:endParaRPr>
-          </a:p>
-        </p:txBody>
-      </p:sp>
-      <p:sp>
-        <p:nvSpPr>
-          <p:cNvPr id="4" name="TextBox 3"/>
-          <p:cNvSpPr txBox="1"/>
-          <p:nvPr/>
-        </p:nvSpPr>
-        <p:spPr>
-          <a:xfrm>
-            <a:off x="305" y="1005840"/>
-            <a:ext cx="12191695" cy="1815882"/>
-          </a:xfrm>
-          <a:prstGeom prst="rect">
-            <a:avLst/>
-          </a:prstGeom>
-          <a:noFill/>
-        </p:spPr>
-        <p:txBody>
-          <a:bodyPr wrap="square">
-            <a:spAutoFit/>
-          </a:bodyPr>
-          <a:lstStyle/>
-          <a:p>
-            <a:pPr algn="l">
-              <a:defRPr sz="1500" b="0">
-                <a:solidFill>
-                  <a:srgbClr val="007DBA"/>
-                </a:solidFill>
-                <a:latin typeface="Segoe UI"/>
-              </a:defRPr>
-            </a:pPr>
-            <a:r>
-              <a:rPr lang="ru-RU" sz="2800" dirty="0">
-                <a:solidFill>
-                  <a:srgbClr val="0070C0"/>
-                </a:solidFill>
-                <a:latin typeface="Segoe UI Black" panose="020B0A02040204020203" pitchFamily="34" charset="0"/>
-                <a:ea typeface="Segoe UI Black" panose="020B0A02040204020203" pitchFamily="34" charset="0"/>
-              </a:rPr>
-              <a:t>Цель: </a:t>
-            </a:r>
-            <a:r>
-              <a:rPr lang="ru-RU" sz="2800" dirty="0">
-                <a:solidFill>
-                  <a:srgbClr val="0070C0"/>
-                </a:solidFill>
-                <a:ea typeface="Segoe UI Black" panose="020B0A02040204020203" pitchFamily="34" charset="0"/>
-                <a:cs typeface="Arial" panose="020B0604020202020204" pitchFamily="34" charset="0"/>
-              </a:rPr>
-              <a:t>разработка вопросно-ответной RAG-системы для автоматизированного подбора средств измерений по запросам метрологов и инженеров на основе описаний типов, загруженных в базу знаний, и сведений из внутренней базы данных предприятия</a:t>
-            </a:r>
-            <a:endParaRPr sz="2800" dirty="0">
-              <a:solidFill>
-                <a:srgbClr val="0070C0"/>
-              </a:solidFill>
-              <a:ea typeface="Segoe UI Black" panose="020B0A02040204020203" pitchFamily="34" charset="0"/>
-              <a:cs typeface="Arial" panose="020B0604020202020204" pitchFamily="34" charset="0"/>
-            </a:endParaRPr>
-          </a:p>
-        </p:txBody>
-      </p:sp>
-      <p:sp>
-        <p:nvSpPr>
-          <p:cNvPr id="6" name="TextBox 5"/>
-          <p:cNvSpPr txBox="1"/>
-          <p:nvPr/>
-        </p:nvSpPr>
-        <p:spPr>
-          <a:xfrm>
-            <a:off x="305" y="3199622"/>
-            <a:ext cx="12191695" cy="3046988"/>
-          </a:xfrm>
-          <a:prstGeom prst="rect">
-            <a:avLst/>
-          </a:prstGeom>
-          <a:noFill/>
-        </p:spPr>
-        <p:txBody>
-          <a:bodyPr wrap="square">
-            <a:spAutoFit/>
-          </a:bodyPr>
-          <a:lstStyle/>
-          <a:p>
-            <a:pPr marL="0" indent="0">
-              <a:buNone/>
-            </a:pPr>
-            <a:r>
-              <a:rPr lang="ru-RU" sz="2400" dirty="0">
-                <a:latin typeface="Segoe UI Black" panose="020B0A02040204020203" pitchFamily="34" charset="0"/>
-                <a:ea typeface="Segoe UI Black" panose="020B0A02040204020203" pitchFamily="34" charset="0"/>
-              </a:rPr>
-              <a:t>Задачи:</a:t>
-            </a:r>
-          </a:p>
-          <a:p>
-            <a:pPr marL="285750" indent="-285750" rtl="0">
-              <a:spcBef>
-                <a:spcPts val="0"/>
-              </a:spcBef>
-              <a:spcAft>
-                <a:spcPts val="0"/>
-              </a:spcAft>
-              <a:buFont typeface="Arial" panose="020B0604020202020204" pitchFamily="34" charset="0"/>
-              <a:buChar char="•"/>
-            </a:pPr>
-            <a:r>
-              <a:rPr lang="ru-RU" sz="1800" b="0" i="0" u="none" strike="noStrike" dirty="0">
-                <a:solidFill>
-                  <a:srgbClr val="000000"/>
-                </a:solidFill>
-                <a:effectLst/>
-                <a:latin typeface="Times New Roman" panose="02020603050405020304" pitchFamily="18" charset="0"/>
-              </a:rPr>
-              <a:t>Изучить предметную область метрологии на предприятии и определить основные сценарии поиска средств измерений</a:t>
-            </a:r>
-          </a:p>
-          <a:p>
-            <a:pPr marL="285750" indent="-285750" rtl="0">
-              <a:spcBef>
-                <a:spcPts val="0"/>
-              </a:spcBef>
-              <a:spcAft>
-                <a:spcPts val="0"/>
-              </a:spcAft>
-              <a:buFont typeface="Arial" panose="020B0604020202020204" pitchFamily="34" charset="0"/>
-              <a:buChar char="•"/>
-            </a:pPr>
-            <a:r>
-              <a:rPr lang="ru-RU" sz="1800" b="0" i="0" u="none" strike="noStrike" dirty="0">
-                <a:solidFill>
-                  <a:srgbClr val="000000"/>
-                </a:solidFill>
-                <a:effectLst/>
-                <a:latin typeface="Times New Roman" panose="02020603050405020304" pitchFamily="18" charset="0"/>
-              </a:rPr>
-              <a:t>Собрать и уточнить требования к автоматизированной системе совместно со специалистами метрологической службы</a:t>
-            </a:r>
-          </a:p>
-          <a:p>
-            <a:pPr marL="285750" indent="-285750" rtl="0">
-              <a:spcBef>
-                <a:spcPts val="0"/>
-              </a:spcBef>
-              <a:spcAft>
-                <a:spcPts val="0"/>
-              </a:spcAft>
-              <a:buFont typeface="Arial" panose="020B0604020202020204" pitchFamily="34" charset="0"/>
-              <a:buChar char="•"/>
-            </a:pPr>
-            <a:r>
-              <a:rPr lang="ru-RU" sz="1800" b="0" i="0" u="none" strike="noStrike" dirty="0">
-                <a:solidFill>
-                  <a:srgbClr val="000000"/>
-                </a:solidFill>
-                <a:effectLst/>
-                <a:latin typeface="Times New Roman" panose="02020603050405020304" pitchFamily="18" charset="0"/>
-              </a:rPr>
-              <a:t>Изучить принципы работы RAG-систем, векторного поиска, </a:t>
-            </a:r>
-            <a:r>
-              <a:rPr lang="ru-RU" sz="1800" b="0" i="0" u="none" strike="noStrike" dirty="0" err="1">
-                <a:solidFill>
-                  <a:srgbClr val="000000"/>
-                </a:solidFill>
-                <a:effectLst/>
-                <a:latin typeface="Times New Roman" panose="02020603050405020304" pitchFamily="18" charset="0"/>
-              </a:rPr>
-              <a:t>эмбеддингов</a:t>
-            </a:r>
-            <a:r>
-              <a:rPr lang="ru-RU" sz="1800" b="0" i="0" u="none" strike="noStrike" dirty="0">
-                <a:solidFill>
-                  <a:srgbClr val="000000"/>
-                </a:solidFill>
-                <a:effectLst/>
-                <a:latin typeface="Times New Roman" panose="02020603050405020304" pitchFamily="18" charset="0"/>
-              </a:rPr>
-              <a:t> и повторного ранжирования</a:t>
-            </a:r>
-          </a:p>
-          <a:p>
-            <a:pPr marL="285750" indent="-285750" rtl="0">
-              <a:spcBef>
-                <a:spcPts val="0"/>
-              </a:spcBef>
-              <a:spcAft>
-                <a:spcPts val="0"/>
-              </a:spcAft>
-              <a:buFont typeface="Arial" panose="020B0604020202020204" pitchFamily="34" charset="0"/>
-              <a:buChar char="•"/>
-            </a:pPr>
-            <a:r>
-              <a:rPr lang="ru-RU" sz="1800" b="0" i="0" u="none" strike="noStrike" dirty="0">
-                <a:solidFill>
-                  <a:srgbClr val="000000"/>
-                </a:solidFill>
-                <a:effectLst/>
-                <a:latin typeface="Times New Roman" panose="02020603050405020304" pitchFamily="18" charset="0"/>
-              </a:rPr>
-              <a:t>Спроектировать архитектуру системы</a:t>
-            </a:r>
-          </a:p>
-          <a:p>
-            <a:pPr marL="285750" indent="-285750" rtl="0">
-              <a:spcBef>
-                <a:spcPts val="0"/>
-              </a:spcBef>
-              <a:spcAft>
-                <a:spcPts val="0"/>
-              </a:spcAft>
-              <a:buFont typeface="Arial" panose="020B0604020202020204" pitchFamily="34" charset="0"/>
-              <a:buChar char="•"/>
-            </a:pPr>
-            <a:r>
-              <a:rPr lang="ru-RU" sz="1800" b="0" i="0" u="none" strike="noStrike" dirty="0">
-                <a:solidFill>
-                  <a:srgbClr val="000000"/>
-                </a:solidFill>
-                <a:effectLst/>
-                <a:latin typeface="Times New Roman" panose="02020603050405020304" pitchFamily="18" charset="0"/>
-              </a:rPr>
-              <a:t>Реализовать модуль загрузки и обработки PDF-документов</a:t>
-            </a:r>
-          </a:p>
-          <a:p>
-            <a:pPr marL="285750" indent="-285750" rtl="0">
-              <a:spcBef>
-                <a:spcPts val="0"/>
-              </a:spcBef>
-              <a:spcAft>
-                <a:spcPts val="0"/>
-              </a:spcAft>
-              <a:buFont typeface="Arial" panose="020B0604020202020204" pitchFamily="34" charset="0"/>
-              <a:buChar char="•"/>
-            </a:pPr>
-            <a:r>
-              <a:rPr lang="ru-RU" sz="1800" b="0" i="0" u="none" strike="noStrike" dirty="0">
-                <a:solidFill>
-                  <a:srgbClr val="000000"/>
-                </a:solidFill>
-                <a:effectLst/>
-                <a:latin typeface="Times New Roman" panose="02020603050405020304" pitchFamily="18" charset="0"/>
-              </a:rPr>
-              <a:t>Реализовать серверную часть приложения и REST API для взаимодействия с клиентской частью</a:t>
-            </a:r>
-          </a:p>
-          <a:p>
-            <a:pPr marL="285750" indent="-285750" rtl="0">
-              <a:spcBef>
-                <a:spcPts val="0"/>
-              </a:spcBef>
-              <a:spcAft>
-                <a:spcPts val="0"/>
-              </a:spcAft>
-              <a:buFont typeface="Arial" panose="020B0604020202020204" pitchFamily="34" charset="0"/>
-              <a:buChar char="•"/>
-            </a:pPr>
-            <a:r>
-              <a:rPr lang="ru-RU" sz="1800" b="0" i="0" u="none" strike="noStrike" dirty="0">
-                <a:solidFill>
-                  <a:srgbClr val="000000"/>
-                </a:solidFill>
-                <a:effectLst/>
-                <a:latin typeface="Times New Roman" panose="02020603050405020304" pitchFamily="18" charset="0"/>
-              </a:rPr>
-              <a:t>Провести функциональную проверку системы</a:t>
-            </a:r>
-          </a:p>
-          <a:p>
-            <a:pPr marL="285750" indent="-285750" rtl="0">
-              <a:spcBef>
-                <a:spcPts val="0"/>
-              </a:spcBef>
-              <a:spcAft>
-                <a:spcPts val="0"/>
-              </a:spcAft>
-              <a:buFont typeface="Arial" panose="020B0604020202020204" pitchFamily="34" charset="0"/>
-              <a:buChar char="•"/>
-            </a:pPr>
-            <a:r>
-              <a:rPr lang="ru-RU" sz="1800" b="0" i="0" u="none" strike="noStrike" dirty="0">
-                <a:solidFill>
-                  <a:srgbClr val="000000"/>
-                </a:solidFill>
-                <a:effectLst/>
-                <a:latin typeface="Times New Roman" panose="02020603050405020304" pitchFamily="18" charset="0"/>
-              </a:rPr>
-              <a:t>Оценить соответствие системы требованиям по времени ответа, автономности и удобству использования</a:t>
-            </a:r>
-            <a:br>
-              <a:rPr lang="ru-RU" sz="2400" dirty="0"/>
-            </a:br>
-            <a:endParaRPr lang="ru-RU" sz="2400" dirty="0">
-              <a:latin typeface="Segoe UI Black" panose="020B0A02040204020203" pitchFamily="34" charset="0"/>
-              <a:ea typeface="Segoe UI Black" panose="020B0A02040204020203" pitchFamily="34" charset="0"/>
             </a:endParaRPr>
           </a:p>
         </p:txBody>
@@ -5067,10 +5909,140 @@
           </a:p>
         </p:txBody>
       </p:sp>
+      <p:sp>
+        <p:nvSpPr>
+          <p:cNvPr id="4" name="TextBox 3">
+            <a:extLst>
+              <a:ext uri="{FF2B5EF4-FFF2-40B4-BE49-F238E27FC236}">
+                <a16:creationId xmlns:a16="http://schemas.microsoft.com/office/drawing/2014/main" id="{83C3AD01-DDE7-4249-956B-1968CA6EB3A1}"/>
+              </a:ext>
+            </a:extLst>
+          </p:cNvPr>
+          <p:cNvSpPr txBox="1"/>
+          <p:nvPr/>
+        </p:nvSpPr>
+        <p:spPr>
+          <a:xfrm>
+            <a:off x="2600035" y="1693333"/>
+            <a:ext cx="482824" cy="369332"/>
+          </a:xfrm>
+          <a:prstGeom prst="rect">
+            <a:avLst/>
+          </a:prstGeom>
+          <a:noFill/>
+        </p:spPr>
+        <p:txBody>
+          <a:bodyPr wrap="none" rtlCol="0">
+            <a:spAutoFit/>
+          </a:bodyPr>
+          <a:lstStyle/>
+          <a:p>
+            <a:r>
+              <a:rPr lang="ru-RU" dirty="0"/>
+              <a:t>До</a:t>
+            </a:r>
+          </a:p>
+        </p:txBody>
+      </p:sp>
+      <p:sp>
+        <p:nvSpPr>
+          <p:cNvPr id="5" name="TextBox 4">
+            <a:extLst>
+              <a:ext uri="{FF2B5EF4-FFF2-40B4-BE49-F238E27FC236}">
+                <a16:creationId xmlns:a16="http://schemas.microsoft.com/office/drawing/2014/main" id="{EB5C73DA-F681-456C-BDE8-1526FB478240}"/>
+              </a:ext>
+            </a:extLst>
+          </p:cNvPr>
+          <p:cNvSpPr txBox="1"/>
+          <p:nvPr/>
+        </p:nvSpPr>
+        <p:spPr>
+          <a:xfrm>
+            <a:off x="8726022" y="1676399"/>
+            <a:ext cx="865943" cy="369332"/>
+          </a:xfrm>
+          <a:prstGeom prst="rect">
+            <a:avLst/>
+          </a:prstGeom>
+          <a:noFill/>
+        </p:spPr>
+        <p:txBody>
+          <a:bodyPr wrap="none" rtlCol="0">
+            <a:spAutoFit/>
+          </a:bodyPr>
+          <a:lstStyle/>
+          <a:p>
+            <a:r>
+              <a:rPr lang="ru-RU" dirty="0"/>
+              <a:t>После</a:t>
+            </a:r>
+          </a:p>
+        </p:txBody>
+      </p:sp>
+      <p:pic>
+        <p:nvPicPr>
+          <p:cNvPr id="6" name="Рисунок 5">
+            <a:extLst>
+              <a:ext uri="{FF2B5EF4-FFF2-40B4-BE49-F238E27FC236}">
+                <a16:creationId xmlns:a16="http://schemas.microsoft.com/office/drawing/2014/main" id="{F3D0B0B5-94DD-44E7-892D-F1C0A03DDBE2}"/>
+              </a:ext>
+            </a:extLst>
+          </p:cNvPr>
+          <p:cNvPicPr>
+            <a:picLocks noChangeAspect="1"/>
+          </p:cNvPicPr>
+          <p:nvPr/>
+        </p:nvPicPr>
+        <p:blipFill>
+          <a:blip r:embed="rId2"/>
+          <a:stretch>
+            <a:fillRect/>
+          </a:stretch>
+        </p:blipFill>
+        <p:spPr>
+          <a:xfrm>
+            <a:off x="105878" y="2268013"/>
+            <a:ext cx="5471139" cy="2745553"/>
+          </a:xfrm>
+          <a:prstGeom prst="rect">
+            <a:avLst/>
+          </a:prstGeom>
+        </p:spPr>
+      </p:pic>
+      <p:pic>
+        <p:nvPicPr>
+          <p:cNvPr id="9" name="Рисунок 8">
+            <a:extLst>
+              <a:ext uri="{FF2B5EF4-FFF2-40B4-BE49-F238E27FC236}">
+                <a16:creationId xmlns:a16="http://schemas.microsoft.com/office/drawing/2014/main" id="{D84096E9-2B25-4122-95D2-BC3A385C995E}"/>
+              </a:ext>
+            </a:extLst>
+          </p:cNvPr>
+          <p:cNvPicPr>
+            <a:picLocks noChangeAspect="1"/>
+          </p:cNvPicPr>
+          <p:nvPr/>
+        </p:nvPicPr>
+        <p:blipFill>
+          <a:blip r:embed="rId3"/>
+          <a:stretch>
+            <a:fillRect/>
+          </a:stretch>
+        </p:blipFill>
+        <p:spPr>
+          <a:xfrm>
+            <a:off x="6385539" y="2934402"/>
+            <a:ext cx="5549787" cy="1146512"/>
+          </a:xfrm>
+          <a:prstGeom prst="rect">
+            <a:avLst/>
+          </a:prstGeom>
+        </p:spPr>
+      </p:pic>
     </p:spTree>
     <p:extLst>
       <p:ext uri="{BB962C8B-B14F-4D97-AF65-F5344CB8AC3E}">
-        <p14:creationId xmlns:p14="http://schemas.microsoft.com/office/powerpoint/2010/main" val="2006041414"/>
+        <p14:creationId xmlns:p14="http://schemas.microsoft.com/office/powerpoint/2010/main" val="3868962474"/>
       </p:ext>
     </p:extLst>
   </p:cSld>
@@ -5162,8 +6134,8 @@
         </p:nvSpPr>
         <p:spPr>
           <a:xfrm>
-            <a:off x="4002821" y="148977"/>
-            <a:ext cx="4881298" cy="707886"/>
+            <a:off x="3852603" y="146471"/>
+            <a:ext cx="4486488" cy="707886"/>
           </a:xfrm>
           <a:prstGeom prst="rect">
             <a:avLst/>
@@ -5188,10 +6160,308 @@
               <a:rPr lang="ru-RU" sz="4000" dirty="0">
                 <a:latin typeface="+mj-lt"/>
               </a:rPr>
-              <a:t>Анализ аналогов</a:t>
+              <a:t>Цели и задачи</a:t>
             </a:r>
             <a:endParaRPr sz="4000" dirty="0">
               <a:latin typeface="+mj-lt"/>
+            </a:endParaRPr>
+          </a:p>
+        </p:txBody>
+      </p:sp>
+      <p:sp>
+        <p:nvSpPr>
+          <p:cNvPr id="4" name="TextBox 3"/>
+          <p:cNvSpPr txBox="1"/>
+          <p:nvPr/>
+        </p:nvSpPr>
+        <p:spPr>
+          <a:xfrm>
+            <a:off x="305" y="1005840"/>
+            <a:ext cx="12191695" cy="1815882"/>
+          </a:xfrm>
+          <a:prstGeom prst="rect">
+            <a:avLst/>
+          </a:prstGeom>
+          <a:noFill/>
+        </p:spPr>
+        <p:txBody>
+          <a:bodyPr wrap="square">
+            <a:spAutoFit/>
+          </a:bodyPr>
+          <a:lstStyle/>
+          <a:p>
+            <a:pPr algn="l">
+              <a:defRPr sz="1500" b="0">
+                <a:solidFill>
+                  <a:srgbClr val="007DBA"/>
+                </a:solidFill>
+                <a:latin typeface="Segoe UI"/>
+              </a:defRPr>
+            </a:pPr>
+            <a:r>
+              <a:rPr lang="ru-RU" sz="2800" dirty="0">
+                <a:solidFill>
+                  <a:srgbClr val="0070C0"/>
+                </a:solidFill>
+                <a:latin typeface="Segoe UI Black" panose="020B0A02040204020203" pitchFamily="34" charset="0"/>
+                <a:ea typeface="Segoe UI Black" panose="020B0A02040204020203" pitchFamily="34" charset="0"/>
+              </a:rPr>
+              <a:t>Цель: </a:t>
+            </a:r>
+            <a:r>
+              <a:rPr lang="ru-RU" sz="2800" dirty="0">
+                <a:solidFill>
+                  <a:srgbClr val="0070C0"/>
+                </a:solidFill>
+                <a:ea typeface="Segoe UI Black" panose="020B0A02040204020203" pitchFamily="34" charset="0"/>
+                <a:cs typeface="Arial" panose="020B0604020202020204" pitchFamily="34" charset="0"/>
+              </a:rPr>
+              <a:t>разработка вопросно-ответной RAG-системы для автоматизированного подбора средств измерений по запросам метрологов и инженеров на основе описаний типов, загруженных в базу знаний, и сведений из внутренней базы данных предприятия</a:t>
+            </a:r>
+            <a:endParaRPr sz="2800" dirty="0">
+              <a:solidFill>
+                <a:srgbClr val="0070C0"/>
+              </a:solidFill>
+              <a:ea typeface="Segoe UI Black" panose="020B0A02040204020203" pitchFamily="34" charset="0"/>
+              <a:cs typeface="Arial" panose="020B0604020202020204" pitchFamily="34" charset="0"/>
+            </a:endParaRPr>
+          </a:p>
+        </p:txBody>
+      </p:sp>
+      <p:sp>
+        <p:nvSpPr>
+          <p:cNvPr id="6" name="TextBox 5"/>
+          <p:cNvSpPr txBox="1"/>
+          <p:nvPr/>
+        </p:nvSpPr>
+        <p:spPr>
+          <a:xfrm>
+            <a:off x="305" y="3199622"/>
+            <a:ext cx="12191695" cy="3046988"/>
+          </a:xfrm>
+          <a:prstGeom prst="rect">
+            <a:avLst/>
+          </a:prstGeom>
+          <a:noFill/>
+        </p:spPr>
+        <p:txBody>
+          <a:bodyPr wrap="square">
+            <a:spAutoFit/>
+          </a:bodyPr>
+          <a:lstStyle/>
+          <a:p>
+            <a:pPr marL="0" indent="0">
+              <a:buNone/>
+            </a:pPr>
+            <a:r>
+              <a:rPr lang="ru-RU" sz="2400" dirty="0">
+                <a:latin typeface="Segoe UI Black" panose="020B0A02040204020203" pitchFamily="34" charset="0"/>
+                <a:ea typeface="Segoe UI Black" panose="020B0A02040204020203" pitchFamily="34" charset="0"/>
+              </a:rPr>
+              <a:t>Задачи:</a:t>
+            </a:r>
+          </a:p>
+          <a:p>
+            <a:pPr marL="285750" indent="-285750" rtl="0">
+              <a:spcBef>
+                <a:spcPts val="0"/>
+              </a:spcBef>
+              <a:spcAft>
+                <a:spcPts val="0"/>
+              </a:spcAft>
+              <a:buFont typeface="Arial" panose="020B0604020202020204" pitchFamily="34" charset="0"/>
+              <a:buChar char="•"/>
+            </a:pPr>
+            <a:r>
+              <a:rPr lang="ru-RU" sz="1800" b="0" i="0" u="none" strike="noStrike" dirty="0">
+                <a:solidFill>
+                  <a:srgbClr val="000000"/>
+                </a:solidFill>
+                <a:effectLst/>
+                <a:latin typeface="Times New Roman" panose="02020603050405020304" pitchFamily="18" charset="0"/>
+              </a:rPr>
+              <a:t>Изучить предметную область метрологии на предприятии и определить основные сценарии поиска средств измерений</a:t>
+            </a:r>
+          </a:p>
+          <a:p>
+            <a:pPr marL="285750" indent="-285750" rtl="0">
+              <a:spcBef>
+                <a:spcPts val="0"/>
+              </a:spcBef>
+              <a:spcAft>
+                <a:spcPts val="0"/>
+              </a:spcAft>
+              <a:buFont typeface="Arial" panose="020B0604020202020204" pitchFamily="34" charset="0"/>
+              <a:buChar char="•"/>
+            </a:pPr>
+            <a:r>
+              <a:rPr lang="ru-RU" sz="1800" b="0" i="0" u="none" strike="noStrike" dirty="0">
+                <a:solidFill>
+                  <a:srgbClr val="000000"/>
+                </a:solidFill>
+                <a:effectLst/>
+                <a:latin typeface="Times New Roman" panose="02020603050405020304" pitchFamily="18" charset="0"/>
+              </a:rPr>
+              <a:t>Собрать и уточнить требования к автоматизированной системе совместно со специалистами метрологической службы</a:t>
+            </a:r>
+          </a:p>
+          <a:p>
+            <a:pPr marL="285750" indent="-285750" rtl="0">
+              <a:spcBef>
+                <a:spcPts val="0"/>
+              </a:spcBef>
+              <a:spcAft>
+                <a:spcPts val="0"/>
+              </a:spcAft>
+              <a:buFont typeface="Arial" panose="020B0604020202020204" pitchFamily="34" charset="0"/>
+              <a:buChar char="•"/>
+            </a:pPr>
+            <a:r>
+              <a:rPr lang="ru-RU" sz="1800" b="0" i="0" u="none" strike="noStrike" dirty="0">
+                <a:solidFill>
+                  <a:srgbClr val="000000"/>
+                </a:solidFill>
+                <a:effectLst/>
+                <a:latin typeface="Times New Roman" panose="02020603050405020304" pitchFamily="18" charset="0"/>
+              </a:rPr>
+              <a:t>Изучить принципы работы RAG-систем, векторного поиска, </a:t>
+            </a:r>
+            <a:r>
+              <a:rPr lang="ru-RU" sz="1800" b="0" i="0" u="none" strike="noStrike" dirty="0" err="1">
+                <a:solidFill>
+                  <a:srgbClr val="000000"/>
+                </a:solidFill>
+                <a:effectLst/>
+                <a:latin typeface="Times New Roman" panose="02020603050405020304" pitchFamily="18" charset="0"/>
+              </a:rPr>
+              <a:t>эмбеддингов</a:t>
+            </a:r>
+            <a:r>
+              <a:rPr lang="ru-RU" sz="1800" b="0" i="0" u="none" strike="noStrike" dirty="0">
+                <a:solidFill>
+                  <a:srgbClr val="000000"/>
+                </a:solidFill>
+                <a:effectLst/>
+                <a:latin typeface="Times New Roman" panose="02020603050405020304" pitchFamily="18" charset="0"/>
+              </a:rPr>
+              <a:t> и повторного ранжирования</a:t>
+            </a:r>
+          </a:p>
+          <a:p>
+            <a:pPr marL="285750" indent="-285750" rtl="0">
+              <a:spcBef>
+                <a:spcPts val="0"/>
+              </a:spcBef>
+              <a:spcAft>
+                <a:spcPts val="0"/>
+              </a:spcAft>
+              <a:buFont typeface="Arial" panose="020B0604020202020204" pitchFamily="34" charset="0"/>
+              <a:buChar char="•"/>
+            </a:pPr>
+            <a:r>
+              <a:rPr lang="ru-RU" sz="1800" b="0" i="0" u="none" strike="noStrike" dirty="0">
+                <a:solidFill>
+                  <a:srgbClr val="000000"/>
+                </a:solidFill>
+                <a:effectLst/>
+                <a:latin typeface="Times New Roman" panose="02020603050405020304" pitchFamily="18" charset="0"/>
+              </a:rPr>
+              <a:t>Спроектировать архитектуру системы</a:t>
+            </a:r>
+          </a:p>
+          <a:p>
+            <a:pPr marL="285750" indent="-285750" rtl="0">
+              <a:spcBef>
+                <a:spcPts val="0"/>
+              </a:spcBef>
+              <a:spcAft>
+                <a:spcPts val="0"/>
+              </a:spcAft>
+              <a:buFont typeface="Arial" panose="020B0604020202020204" pitchFamily="34" charset="0"/>
+              <a:buChar char="•"/>
+            </a:pPr>
+            <a:r>
+              <a:rPr lang="ru-RU" sz="1800" b="0" i="0" u="none" strike="noStrike" dirty="0">
+                <a:solidFill>
+                  <a:srgbClr val="000000"/>
+                </a:solidFill>
+                <a:effectLst/>
+                <a:latin typeface="Times New Roman" panose="02020603050405020304" pitchFamily="18" charset="0"/>
+              </a:rPr>
+              <a:t>Реализовать модуль загрузки и обработки PDF-документов</a:t>
+            </a:r>
+          </a:p>
+          <a:p>
+            <a:pPr marL="285750" indent="-285750" rtl="0">
+              <a:spcBef>
+                <a:spcPts val="0"/>
+              </a:spcBef>
+              <a:spcAft>
+                <a:spcPts val="0"/>
+              </a:spcAft>
+              <a:buFont typeface="Arial" panose="020B0604020202020204" pitchFamily="34" charset="0"/>
+              <a:buChar char="•"/>
+            </a:pPr>
+            <a:r>
+              <a:rPr lang="ru-RU" sz="1800" b="0" i="0" u="none" strike="noStrike" dirty="0">
+                <a:solidFill>
+                  <a:srgbClr val="000000"/>
+                </a:solidFill>
+                <a:effectLst/>
+                <a:latin typeface="Times New Roman" panose="02020603050405020304" pitchFamily="18" charset="0"/>
+              </a:rPr>
+              <a:t>Реализовать серверную часть приложения и REST API для взаимодействия с клиентской частью</a:t>
+            </a:r>
+          </a:p>
+          <a:p>
+            <a:pPr marL="285750" indent="-285750" rtl="0">
+              <a:spcBef>
+                <a:spcPts val="0"/>
+              </a:spcBef>
+              <a:spcAft>
+                <a:spcPts val="0"/>
+              </a:spcAft>
+              <a:buFont typeface="Arial" panose="020B0604020202020204" pitchFamily="34" charset="0"/>
+              <a:buChar char="•"/>
+            </a:pPr>
+            <a:r>
+              <a:rPr lang="ru-RU" sz="1800" b="0" i="0" u="none" strike="noStrike" dirty="0">
+                <a:solidFill>
+                  <a:srgbClr val="000000"/>
+                </a:solidFill>
+                <a:effectLst/>
+                <a:latin typeface="Times New Roman" panose="02020603050405020304" pitchFamily="18" charset="0"/>
+              </a:rPr>
+              <a:t>Провести функциональную проверку системы</a:t>
+            </a:r>
+          </a:p>
+          <a:p>
+            <a:pPr marL="285750" indent="-285750" rtl="0">
+              <a:spcBef>
+                <a:spcPts val="0"/>
+              </a:spcBef>
+              <a:spcAft>
+                <a:spcPts val="0"/>
+              </a:spcAft>
+              <a:buFont typeface="Arial" panose="020B0604020202020204" pitchFamily="34" charset="0"/>
+              <a:buChar char="•"/>
+            </a:pPr>
+            <a:r>
+              <a:rPr lang="ru-RU" sz="1800" b="0" i="0" u="none" strike="noStrike" dirty="0">
+                <a:solidFill>
+                  <a:srgbClr val="000000"/>
+                </a:solidFill>
+                <a:effectLst/>
+                <a:latin typeface="Times New Roman" panose="02020603050405020304" pitchFamily="18" charset="0"/>
+              </a:rPr>
+              <a:t>Оценить соответствие системы требованиям по времени ответа, автономности и удобству использования</a:t>
+            </a:r>
+            <a:br>
+              <a:rPr lang="ru-RU" sz="2400" dirty="0"/>
+            </a:br>
+            <a:endParaRPr lang="ru-RU" sz="2400" dirty="0">
+              <a:latin typeface="Segoe UI Black" panose="020B0A02040204020203" pitchFamily="34" charset="0"/>
+              <a:ea typeface="Segoe UI Black" panose="020B0A02040204020203" pitchFamily="34" charset="0"/>
             </a:endParaRPr>
           </a:p>
         </p:txBody>
@@ -5224,6 +6494,185 @@
               </a:rPr>
               <a:pPr/>
               <a:t>4</a:t>
+            </a:fld>
+            <a:r>
+              <a:rPr lang="en-US" b="1" dirty="0">
+                <a:latin typeface="Segoe UI" panose="020B0502040204020203" pitchFamily="34" charset="0"/>
+                <a:cs typeface="Segoe UI" panose="020B0502040204020203" pitchFamily="34" charset="0"/>
+              </a:rPr>
+              <a:t>/2</a:t>
+            </a:r>
+            <a:r>
+              <a:rPr lang="ru-RU" b="1" dirty="0">
+                <a:latin typeface="Segoe UI" panose="020B0502040204020203" pitchFamily="34" charset="0"/>
+                <a:cs typeface="Segoe UI" panose="020B0502040204020203" pitchFamily="34" charset="0"/>
+              </a:rPr>
+              <a:t>6</a:t>
+            </a:r>
+            <a:endParaRPr lang="en-US" b="1" dirty="0">
+              <a:latin typeface="Segoe UI" panose="020B0502040204020203" pitchFamily="34" charset="0"/>
+              <a:cs typeface="Segoe UI" panose="020B0502040204020203" pitchFamily="34" charset="0"/>
+            </a:endParaRPr>
+          </a:p>
+        </p:txBody>
+      </p:sp>
+    </p:spTree>
+    <p:extLst>
+      <p:ext uri="{BB962C8B-B14F-4D97-AF65-F5344CB8AC3E}">
+        <p14:creationId xmlns:p14="http://schemas.microsoft.com/office/powerpoint/2010/main" val="2006041414"/>
+      </p:ext>
+    </p:extLst>
+  </p:cSld>
+  <p:clrMapOvr>
+    <a:masterClrMapping/>
+  </p:clrMapOvr>
+</p:sld>
+</file>
+
+<file path=ppt/slides/slide5.xml><?xml version="1.0" encoding="utf-8"?>
+<p:sld xmlns:a="http://schemas.openxmlformats.org/drawingml/2006/main" xmlns:r="http://schemas.openxmlformats.org/officeDocument/2006/relationships" xmlns:p="http://schemas.openxmlformats.org/presentationml/2006/main">
+  <p:cSld>
+    <p:bg>
+      <p:bgPr>
+        <a:solidFill>
+          <a:schemeClr val="bg1">
+            <a:lumMod val="95000"/>
+          </a:schemeClr>
+        </a:solidFill>
+        <a:effectLst/>
+      </p:bgPr>
+    </p:bg>
+    <p:spTree>
+      <p:nvGrpSpPr>
+        <p:cNvPr id="1" name=""/>
+        <p:cNvGrpSpPr/>
+        <p:nvPr/>
+      </p:nvGrpSpPr>
+      <p:grpSpPr>
+        <a:xfrm>
+          <a:off x="0" y="0"/>
+          <a:ext cx="0" cy="0"/>
+          <a:chOff x="0" y="0"/>
+          <a:chExt cx="0" cy="0"/>
+        </a:xfrm>
+      </p:grpSpPr>
+      <p:sp>
+        <p:nvSpPr>
+          <p:cNvPr id="2" name="Rectangle 1"/>
+          <p:cNvSpPr/>
+          <p:nvPr/>
+        </p:nvSpPr>
+        <p:spPr>
+          <a:xfrm>
+            <a:off x="0" y="0"/>
+            <a:ext cx="12191695" cy="1005840"/>
+          </a:xfrm>
+          <a:prstGeom prst="rect">
+            <a:avLst/>
+          </a:prstGeom>
+          <a:solidFill>
+            <a:schemeClr val="accent5">
+              <a:lumMod val="75000"/>
+            </a:schemeClr>
+          </a:solidFill>
+          <a:ln>
+            <a:noFill/>
+          </a:ln>
+          <a:effectLst/>
+        </p:spPr>
+        <p:style>
+          <a:lnRef idx="1">
+            <a:schemeClr val="accent1"/>
+          </a:lnRef>
+          <a:fillRef idx="3">
+            <a:schemeClr val="accent1"/>
+          </a:fillRef>
+          <a:effectRef idx="2">
+            <a:schemeClr val="accent1"/>
+          </a:effectRef>
+          <a:fontRef idx="minor">
+            <a:schemeClr val="lt1"/>
+          </a:fontRef>
+        </p:style>
+        <p:txBody>
+          <a:bodyPr rtlCol="0" anchor="ctr"/>
+          <a:lstStyle/>
+          <a:p>
+            <a:pPr algn="ctr"/>
+            <a:endParaRPr/>
+          </a:p>
+        </p:txBody>
+      </p:sp>
+      <p:sp>
+        <p:nvSpPr>
+          <p:cNvPr id="3" name="TextBox 2"/>
+          <p:cNvSpPr txBox="1"/>
+          <p:nvPr/>
+        </p:nvSpPr>
+        <p:spPr>
+          <a:xfrm>
+            <a:off x="3655198" y="148977"/>
+            <a:ext cx="4881298" cy="707886"/>
+          </a:xfrm>
+          <a:prstGeom prst="rect">
+            <a:avLst/>
+          </a:prstGeom>
+          <a:noFill/>
+        </p:spPr>
+        <p:txBody>
+          <a:bodyPr wrap="square">
+            <a:spAutoFit/>
+          </a:bodyPr>
+          <a:lstStyle/>
+          <a:p>
+            <a:pPr algn="l">
+              <a:defRPr sz="2800" b="1">
+                <a:solidFill>
+                  <a:srgbClr val="FFFFFF"/>
+                </a:solidFill>
+                <a:latin typeface="Segoe UI"/>
+              </a:defRPr>
+            </a:pPr>
+            <a:r>
+              <a:rPr lang="ru-RU" sz="4000" dirty="0">
+                <a:latin typeface="+mj-lt"/>
+              </a:rPr>
+              <a:t>Анализ аналогов</a:t>
+            </a:r>
+            <a:endParaRPr sz="4000" dirty="0">
+              <a:latin typeface="+mj-lt"/>
+            </a:endParaRPr>
+          </a:p>
+        </p:txBody>
+      </p:sp>
+      <p:sp>
+        <p:nvSpPr>
+          <p:cNvPr id="7" name="Прямоугольник 6"/>
+          <p:cNvSpPr/>
+          <p:nvPr/>
+        </p:nvSpPr>
+        <p:spPr>
+          <a:xfrm>
+            <a:off x="10840870" y="6054593"/>
+            <a:ext cx="686406" cy="369332"/>
+          </a:xfrm>
+          <a:prstGeom prst="rect">
+            <a:avLst/>
+          </a:prstGeom>
+        </p:spPr>
+        <p:txBody>
+          <a:bodyPr wrap="none">
+            <a:spAutoFit/>
+          </a:bodyPr>
+          <a:lstStyle/>
+          <a:p>
+            <a:fld id="{C1FF6DA9-008F-8B48-92A6-B652298478BF}" type="slidenum">
+              <a:rPr lang="en-US" b="1" smtClean="0">
+                <a:latin typeface="Segoe UI" panose="020B0502040204020203" pitchFamily="34" charset="0"/>
+                <a:cs typeface="Segoe UI" panose="020B0502040204020203" pitchFamily="34" charset="0"/>
+              </a:rPr>
+              <a:pPr/>
+              <a:t>5</a:t>
             </a:fld>
             <a:r>
               <a:rPr lang="en-US" b="1" dirty="0">
@@ -6018,7 +7467,7 @@
 </p:sld>
 </file>
 
-<file path=ppt/slides/slide5.xml><?xml version="1.0" encoding="utf-8"?>
+<file path=ppt/slides/slide6.xml><?xml version="1.0" encoding="utf-8"?>
 <p:sld xmlns:a="http://schemas.openxmlformats.org/drawingml/2006/main" xmlns:r="http://schemas.openxmlformats.org/officeDocument/2006/relationships" xmlns:p="http://schemas.openxmlformats.org/presentationml/2006/main">
   <p:cSld>
     <p:bg>
@@ -6161,7 +7610,7 @@
                 <a:cs typeface="Segoe UI" panose="020B0502040204020203" pitchFamily="34" charset="0"/>
               </a:rPr>
               <a:pPr/>
-              <a:t>5</a:t>
+              <a:t>6</a:t>
             </a:fld>
             <a:r>
               <a:rPr lang="en-US" b="1" dirty="0">
@@ -6822,17 +8271,9 @@
 </p:sld>
 </file>
 
-<file path=ppt/slides/slide6.xml><?xml version="1.0" encoding="utf-8"?>
+<file path=ppt/slides/slide7.xml><?xml version="1.0" encoding="utf-8"?>
 <p:sld xmlns:a="http://schemas.openxmlformats.org/drawingml/2006/main" xmlns:r="http://schemas.openxmlformats.org/officeDocument/2006/relationships" xmlns:p="http://schemas.openxmlformats.org/presentationml/2006/main">
   <p:cSld>
-    <p:bg>
-      <p:bgPr>
-        <a:solidFill>
-          <a:schemeClr val="bg1"/>
-        </a:solidFill>
-        <a:effectLst/>
-      </p:bgPr>
-    </p:bg>
     <p:spTree>
       <p:nvGrpSpPr>
         <p:cNvPr id="1" name=""/>
@@ -6902,8 +8343,8 @@
         </p:nvSpPr>
         <p:spPr>
           <a:xfrm>
-            <a:off x="3437149" y="148977"/>
-            <a:ext cx="5317396" cy="707886"/>
+            <a:off x="2981663" y="148977"/>
+            <a:ext cx="6228368" cy="707886"/>
           </a:xfrm>
           <a:prstGeom prst="rect">
             <a:avLst/>
@@ -6928,7 +8369,7 @@
               <a:rPr lang="ru-RU" sz="4000" dirty="0">
                 <a:latin typeface="+mj-lt"/>
               </a:rPr>
-              <a:t>Путь пользователя</a:t>
+              <a:t>Архитектура системы</a:t>
             </a:r>
             <a:endParaRPr sz="4000" dirty="0">
               <a:latin typeface="+mj-lt"/>
@@ -6963,7 +8404,7 @@
                 <a:cs typeface="Segoe UI" panose="020B0502040204020203" pitchFamily="34" charset="0"/>
               </a:rPr>
               <a:pPr/>
-              <a:t>6</a:t>
+              <a:t>7</a:t>
             </a:fld>
             <a:r>
               <a:rPr lang="en-US" b="1" dirty="0">
@@ -6986,82 +8427,12 @@
           </a:p>
         </p:txBody>
       </p:sp>
-      <p:sp>
-        <p:nvSpPr>
-          <p:cNvPr id="4" name="TextBox 3">
+      <p:pic>
+        <p:nvPicPr>
+          <p:cNvPr id="11" name="image8.png">
             <a:extLst>
               <a:ext uri="{FF2B5EF4-FFF2-40B4-BE49-F238E27FC236}">
-                <a16:creationId xmlns:a16="http://schemas.microsoft.com/office/drawing/2014/main" id="{83C3AD01-DDE7-4249-956B-1968CA6EB3A1}"/>
-              </a:ext>
-            </a:extLst>
-          </p:cNvPr>
-          <p:cNvSpPr txBox="1"/>
-          <p:nvPr/>
-        </p:nvSpPr>
-        <p:spPr>
-          <a:xfrm>
-            <a:off x="1524000" y="1794933"/>
-            <a:ext cx="482824" cy="369332"/>
-          </a:xfrm>
-          <a:prstGeom prst="rect">
-            <a:avLst/>
-          </a:prstGeom>
-          <a:noFill/>
-        </p:spPr>
-        <p:txBody>
-          <a:bodyPr wrap="none" rtlCol="0">
-            <a:spAutoFit/>
-          </a:bodyPr>
-          <a:lstStyle/>
-          <a:p>
-            <a:r>
-              <a:rPr lang="ru-RU" dirty="0"/>
-              <a:t>До</a:t>
-            </a:r>
-          </a:p>
-        </p:txBody>
-      </p:sp>
-      <p:sp>
-        <p:nvSpPr>
-          <p:cNvPr id="5" name="TextBox 4">
-            <a:extLst>
-              <a:ext uri="{FF2B5EF4-FFF2-40B4-BE49-F238E27FC236}">
-                <a16:creationId xmlns:a16="http://schemas.microsoft.com/office/drawing/2014/main" id="{EB5C73DA-F681-456C-BDE8-1526FB478240}"/>
-              </a:ext>
-            </a:extLst>
-          </p:cNvPr>
-          <p:cNvSpPr txBox="1"/>
-          <p:nvPr/>
-        </p:nvSpPr>
-        <p:spPr>
-          <a:xfrm>
-            <a:off x="8652933" y="1693333"/>
-            <a:ext cx="865943" cy="369332"/>
-          </a:xfrm>
-          <a:prstGeom prst="rect">
-            <a:avLst/>
-          </a:prstGeom>
-          <a:noFill/>
-        </p:spPr>
-        <p:txBody>
-          <a:bodyPr wrap="none" rtlCol="0">
-            <a:spAutoFit/>
-          </a:bodyPr>
-          <a:lstStyle/>
-          <a:p>
-            <a:r>
-              <a:rPr lang="ru-RU" dirty="0"/>
-              <a:t>После</a:t>
-            </a:r>
-          </a:p>
-        </p:txBody>
-      </p:sp>
-      <p:pic>
-        <p:nvPicPr>
-          <p:cNvPr id="6" name="Рисунок 5">
-            <a:extLst>
-              <a:ext uri="{FF2B5EF4-FFF2-40B4-BE49-F238E27FC236}">
-                <a16:creationId xmlns:a16="http://schemas.microsoft.com/office/drawing/2014/main" id="{F3D0B0B5-94DD-44E7-892D-F1C0A03DDBE2}"/>
+                <a16:creationId xmlns:a16="http://schemas.microsoft.com/office/drawing/2014/main" id="{EF064122-46E5-4D5E-B04A-75E8CFB6D774}"/>
               </a:ext>
             </a:extLst>
           </p:cNvPr>
@@ -7072,233 +8443,26 @@
         </p:nvPicPr>
         <p:blipFill>
           <a:blip r:embed="rId2"/>
+          <a:srcRect/>
           <a:stretch>
             <a:fillRect/>
           </a:stretch>
         </p:blipFill>
         <p:spPr>
           <a:xfrm>
-            <a:off x="105878" y="2268013"/>
-            <a:ext cx="5471139" cy="2745553"/>
-          </a:xfrm>
-          <a:prstGeom prst="rect">
-            <a:avLst/>
-          </a:prstGeom>
-        </p:spPr>
-      </p:pic>
-      <p:pic>
-        <p:nvPicPr>
-          <p:cNvPr id="9" name="Рисунок 8">
-            <a:extLst>
-              <a:ext uri="{FF2B5EF4-FFF2-40B4-BE49-F238E27FC236}">
-                <a16:creationId xmlns:a16="http://schemas.microsoft.com/office/drawing/2014/main" id="{D84096E9-2B25-4122-95D2-BC3A385C995E}"/>
-              </a:ext>
-            </a:extLst>
-          </p:cNvPr>
-          <p:cNvPicPr>
-            <a:picLocks noChangeAspect="1"/>
-          </p:cNvPicPr>
-          <p:nvPr/>
-        </p:nvPicPr>
-        <p:blipFill>
-          <a:blip r:embed="rId3"/>
-          <a:stretch>
-            <a:fillRect/>
-          </a:stretch>
-        </p:blipFill>
-        <p:spPr>
-          <a:xfrm>
-            <a:off x="6385539" y="2934402"/>
-            <a:ext cx="5549787" cy="1146512"/>
-          </a:xfrm>
-          <a:prstGeom prst="rect">
-            <a:avLst/>
-          </a:prstGeom>
+            <a:off x="1455175" y="1491531"/>
+            <a:ext cx="9281344" cy="4613371"/>
+          </a:xfrm>
+          <a:prstGeom prst="rect">
+            <a:avLst/>
+          </a:prstGeom>
+          <a:ln/>
         </p:spPr>
       </p:pic>
     </p:spTree>
     <p:extLst>
       <p:ext uri="{BB962C8B-B14F-4D97-AF65-F5344CB8AC3E}">
-        <p14:creationId xmlns:p14="http://schemas.microsoft.com/office/powerpoint/2010/main" val="3868962474"/>
-      </p:ext>
-    </p:extLst>
-  </p:cSld>
-  <p:clrMapOvr>
-    <a:masterClrMapping/>
-  </p:clrMapOvr>
-</p:sld>
-</file>
-
-<file path=ppt/slides/slide7.xml><?xml version="1.0" encoding="utf-8"?>
-<p:sld xmlns:a="http://schemas.openxmlformats.org/drawingml/2006/main" xmlns:r="http://schemas.openxmlformats.org/officeDocument/2006/relationships" xmlns:p="http://schemas.openxmlformats.org/presentationml/2006/main">
-  <p:cSld>
-    <p:bg>
-      <p:bgPr>
-        <a:solidFill>
-          <a:schemeClr val="bg1">
-            <a:lumMod val="95000"/>
-          </a:schemeClr>
-        </a:solidFill>
-        <a:effectLst/>
-      </p:bgPr>
-    </p:bg>
-    <p:spTree>
-      <p:nvGrpSpPr>
-        <p:cNvPr id="1" name=""/>
-        <p:cNvGrpSpPr/>
-        <p:nvPr/>
-      </p:nvGrpSpPr>
-      <p:grpSpPr>
-        <a:xfrm>
-          <a:off x="0" y="0"/>
-          <a:ext cx="0" cy="0"/>
-          <a:chOff x="0" y="0"/>
-          <a:chExt cx="0" cy="0"/>
-        </a:xfrm>
-      </p:grpSpPr>
-      <p:sp>
-        <p:nvSpPr>
-          <p:cNvPr id="2" name="Rectangle 1"/>
-          <p:cNvSpPr/>
-          <p:nvPr/>
-        </p:nvSpPr>
-        <p:spPr>
-          <a:xfrm>
-            <a:off x="0" y="0"/>
-            <a:ext cx="12191695" cy="1005840"/>
-          </a:xfrm>
-          <a:prstGeom prst="rect">
-            <a:avLst/>
-          </a:prstGeom>
-          <a:solidFill>
-            <a:schemeClr val="accent5">
-              <a:lumMod val="75000"/>
-            </a:schemeClr>
-          </a:solidFill>
-          <a:ln>
-            <a:noFill/>
-          </a:ln>
-          <a:effectLst/>
-        </p:spPr>
-        <p:style>
-          <a:lnRef idx="1">
-            <a:schemeClr val="accent1"/>
-          </a:lnRef>
-          <a:fillRef idx="3">
-            <a:schemeClr val="accent1"/>
-          </a:fillRef>
-          <a:effectRef idx="2">
-            <a:schemeClr val="accent1"/>
-          </a:effectRef>
-          <a:fontRef idx="minor">
-            <a:schemeClr val="lt1"/>
-          </a:fontRef>
-        </p:style>
-        <p:txBody>
-          <a:bodyPr rtlCol="0" anchor="ctr"/>
-          <a:lstStyle/>
-          <a:p>
-            <a:pPr algn="ctr"/>
-            <a:endParaRPr/>
-          </a:p>
-        </p:txBody>
-      </p:sp>
-      <p:sp>
-        <p:nvSpPr>
-          <p:cNvPr id="3" name="TextBox 2"/>
-          <p:cNvSpPr txBox="1"/>
-          <p:nvPr/>
-        </p:nvSpPr>
-        <p:spPr>
-          <a:xfrm>
-            <a:off x="1981981" y="148977"/>
-            <a:ext cx="8807116" cy="707886"/>
-          </a:xfrm>
-          <a:prstGeom prst="rect">
-            <a:avLst/>
-          </a:prstGeom>
-          <a:noFill/>
-        </p:spPr>
-        <p:txBody>
-          <a:bodyPr wrap="square">
-            <a:spAutoFit/>
-          </a:bodyPr>
-          <a:lstStyle/>
-          <a:p>
-            <a:pPr algn="l">
-              <a:defRPr sz="2800" b="1">
-                <a:solidFill>
-                  <a:srgbClr val="FFFFFF"/>
-                </a:solidFill>
-                <a:latin typeface="Segoe UI"/>
-              </a:defRPr>
-            </a:pPr>
-            <a:r>
-              <a:rPr lang="ru-RU" sz="4000" dirty="0">
-                <a:latin typeface="+mj-lt"/>
-              </a:rPr>
-              <a:t>Основной функционал системы</a:t>
-            </a:r>
-            <a:endParaRPr sz="4000" dirty="0">
-              <a:latin typeface="+mj-lt"/>
-            </a:endParaRPr>
-          </a:p>
-        </p:txBody>
-      </p:sp>
-      <p:sp>
-        <p:nvSpPr>
-          <p:cNvPr id="7" name="Прямоугольник 6"/>
-          <p:cNvSpPr/>
-          <p:nvPr/>
-        </p:nvSpPr>
-        <p:spPr>
-          <a:xfrm>
-            <a:off x="10840870" y="6054593"/>
-            <a:ext cx="686406" cy="369332"/>
-          </a:xfrm>
-          <a:prstGeom prst="rect">
-            <a:avLst/>
-          </a:prstGeom>
-        </p:spPr>
-        <p:txBody>
-          <a:bodyPr wrap="none">
-            <a:spAutoFit/>
-          </a:bodyPr>
-          <a:lstStyle/>
-          <a:p>
-            <a:fld id="{C1FF6DA9-008F-8B48-92A6-B652298478BF}" type="slidenum">
-              <a:rPr lang="en-US" b="1" smtClean="0">
-                <a:latin typeface="Segoe UI" panose="020B0502040204020203" pitchFamily="34" charset="0"/>
-                <a:cs typeface="Segoe UI" panose="020B0502040204020203" pitchFamily="34" charset="0"/>
-              </a:rPr>
-              <a:pPr/>
-              <a:t>7</a:t>
-            </a:fld>
-            <a:r>
-              <a:rPr lang="en-US" b="1" dirty="0">
-                <a:latin typeface="Segoe UI" panose="020B0502040204020203" pitchFamily="34" charset="0"/>
-                <a:cs typeface="Segoe UI" panose="020B0502040204020203" pitchFamily="34" charset="0"/>
-              </a:rPr>
-              <a:t>/2</a:t>
-            </a:r>
-            <a:r>
-              <a:rPr lang="ru-RU" b="1" dirty="0">
-                <a:latin typeface="Segoe UI" panose="020B0502040204020203" pitchFamily="34" charset="0"/>
-                <a:cs typeface="Segoe UI" panose="020B0502040204020203" pitchFamily="34" charset="0"/>
-              </a:rPr>
-              <a:t>6</a:t>
-            </a:r>
-            <a:endParaRPr lang="en-US" b="1" dirty="0">
-              <a:latin typeface="Segoe UI" panose="020B0502040204020203" pitchFamily="34" charset="0"/>
-              <a:cs typeface="Segoe UI" panose="020B0502040204020203" pitchFamily="34" charset="0"/>
-            </a:endParaRPr>
-          </a:p>
-        </p:txBody>
-      </p:sp>
-    </p:spTree>
-    <p:extLst>
-      <p:ext uri="{BB962C8B-B14F-4D97-AF65-F5344CB8AC3E}">
-        <p14:creationId xmlns:p14="http://schemas.microsoft.com/office/powerpoint/2010/main" val="199149412"/>
+        <p14:creationId xmlns:p14="http://schemas.microsoft.com/office/powerpoint/2010/main" val="1038954094"/>
       </p:ext>
     </p:extLst>
   </p:cSld>
@@ -7380,8 +8544,8 @@
         </p:nvSpPr>
         <p:spPr>
           <a:xfrm>
-            <a:off x="1981981" y="148977"/>
-            <a:ext cx="8807116" cy="707886"/>
+            <a:off x="1667780" y="148977"/>
+            <a:ext cx="8856133" cy="707886"/>
           </a:xfrm>
           <a:prstGeom prst="rect">
             <a:avLst/>
@@ -7406,7 +8570,7 @@
               <a:rPr lang="ru-RU" sz="4000" dirty="0">
                 <a:latin typeface="+mj-lt"/>
               </a:rPr>
-              <a:t>Основной функционал системы</a:t>
+              <a:t>Схемы работы модуля загрузки</a:t>
             </a:r>
             <a:endParaRPr sz="4000" dirty="0">
               <a:latin typeface="+mj-lt"/>
@@ -7464,46 +8628,40 @@
           </a:p>
         </p:txBody>
       </p:sp>
-      <p:sp>
-        <p:nvSpPr>
-          <p:cNvPr id="4" name="TextBox 3">
+      <p:pic>
+        <p:nvPicPr>
+          <p:cNvPr id="4" name="Рисунок 3">
             <a:extLst>
               <a:ext uri="{FF2B5EF4-FFF2-40B4-BE49-F238E27FC236}">
-                <a16:creationId xmlns:a16="http://schemas.microsoft.com/office/drawing/2014/main" id="{70CFF030-81F6-46FA-948F-C1DA59ACB02F}"/>
+                <a16:creationId xmlns:a16="http://schemas.microsoft.com/office/drawing/2014/main" id="{763EBEEB-9CED-40A2-9DA6-2CA799BC98F0}"/>
               </a:ext>
             </a:extLst>
           </p:cNvPr>
-          <p:cNvSpPr txBox="1"/>
-          <p:nvPr/>
-        </p:nvSpPr>
-        <p:spPr>
-          <a:xfrm>
-            <a:off x="4268073" y="2814149"/>
-            <a:ext cx="1258679" cy="369332"/>
-          </a:xfrm>
-          <a:prstGeom prst="rect">
-            <a:avLst/>
-          </a:prstGeom>
-          <a:noFill/>
-        </p:spPr>
-        <p:txBody>
-          <a:bodyPr wrap="none" rtlCol="0">
-            <a:spAutoFit/>
-          </a:bodyPr>
-          <a:lstStyle/>
-          <a:p>
-            <a:pPr algn="r"/>
-            <a:r>
-              <a:rPr lang="ru-RU" dirty="0"/>
-              <a:t>Картинка</a:t>
-            </a:r>
-          </a:p>
-        </p:txBody>
-      </p:sp>
+          <p:cNvPicPr>
+            <a:picLocks noChangeAspect="1"/>
+          </p:cNvPicPr>
+          <p:nvPr/>
+        </p:nvPicPr>
+        <p:blipFill>
+          <a:blip r:embed="rId2"/>
+          <a:stretch>
+            <a:fillRect/>
+          </a:stretch>
+        </p:blipFill>
+        <p:spPr>
+          <a:xfrm>
+            <a:off x="3529475" y="1027702"/>
+            <a:ext cx="5132742" cy="5681321"/>
+          </a:xfrm>
+          <a:prstGeom prst="rect">
+            <a:avLst/>
+          </a:prstGeom>
+        </p:spPr>
+      </p:pic>
     </p:spTree>
     <p:extLst>
       <p:ext uri="{BB962C8B-B14F-4D97-AF65-F5344CB8AC3E}">
-        <p14:creationId xmlns:p14="http://schemas.microsoft.com/office/powerpoint/2010/main" val="1270246117"/>
+        <p14:creationId xmlns:p14="http://schemas.microsoft.com/office/powerpoint/2010/main" val="715469260"/>
       </p:ext>
     </p:extLst>
   </p:cSld>
@@ -7585,8 +8743,8 @@
         </p:nvSpPr>
         <p:spPr>
           <a:xfrm>
-            <a:off x="1981981" y="148977"/>
-            <a:ext cx="8807116" cy="707886"/>
+            <a:off x="1667780" y="148977"/>
+            <a:ext cx="8856133" cy="707886"/>
           </a:xfrm>
           <a:prstGeom prst="rect">
             <a:avLst/>
@@ -7611,7 +8769,7 @@
               <a:rPr lang="ru-RU" sz="4000" dirty="0">
                 <a:latin typeface="+mj-lt"/>
               </a:rPr>
-              <a:t>Основной функционал системы</a:t>
+              <a:t>Схемы работы модуля загрузки</a:t>
             </a:r>
             <a:endParaRPr sz="4000" dirty="0">
               <a:latin typeface="+mj-lt"/>
@@ -7669,46 +8827,42 @@
           </a:p>
         </p:txBody>
       </p:sp>
-      <p:sp>
-        <p:nvSpPr>
-          <p:cNvPr id="4" name="TextBox 3">
+      <p:pic>
+        <p:nvPicPr>
+          <p:cNvPr id="6" name="image2.png">
             <a:extLst>
               <a:ext uri="{FF2B5EF4-FFF2-40B4-BE49-F238E27FC236}">
-                <a16:creationId xmlns:a16="http://schemas.microsoft.com/office/drawing/2014/main" id="{70CFF030-81F6-46FA-948F-C1DA59ACB02F}"/>
+                <a16:creationId xmlns:a16="http://schemas.microsoft.com/office/drawing/2014/main" id="{FD0EA8B6-E0E7-4B73-852A-0192AB2EF4D7}"/>
               </a:ext>
             </a:extLst>
           </p:cNvPr>
-          <p:cNvSpPr txBox="1"/>
-          <p:nvPr/>
-        </p:nvSpPr>
-        <p:spPr>
-          <a:xfrm>
-            <a:off x="4268073" y="2814149"/>
-            <a:ext cx="1258679" cy="369332"/>
-          </a:xfrm>
-          <a:prstGeom prst="rect">
-            <a:avLst/>
-          </a:prstGeom>
-          <a:noFill/>
-        </p:spPr>
-        <p:txBody>
-          <a:bodyPr wrap="none" rtlCol="0">
-            <a:spAutoFit/>
-          </a:bodyPr>
-          <a:lstStyle/>
-          <a:p>
-            <a:pPr algn="r"/>
-            <a:r>
-              <a:rPr lang="ru-RU" dirty="0"/>
-              <a:t>Картинка</a:t>
-            </a:r>
-          </a:p>
-        </p:txBody>
-      </p:sp>
+          <p:cNvPicPr>
+            <a:picLocks noChangeAspect="1"/>
+          </p:cNvPicPr>
+          <p:nvPr/>
+        </p:nvPicPr>
+        <p:blipFill>
+          <a:blip r:embed="rId2"/>
+          <a:srcRect/>
+          <a:stretch>
+            <a:fillRect/>
+          </a:stretch>
+        </p:blipFill>
+        <p:spPr>
+          <a:xfrm>
+            <a:off x="956570" y="1835283"/>
+            <a:ext cx="10278860" cy="3448987"/>
+          </a:xfrm>
+          <a:prstGeom prst="rect">
+            <a:avLst/>
+          </a:prstGeom>
+          <a:ln/>
+        </p:spPr>
+      </p:pic>
     </p:spTree>
     <p:extLst>
       <p:ext uri="{BB962C8B-B14F-4D97-AF65-F5344CB8AC3E}">
-        <p14:creationId xmlns:p14="http://schemas.microsoft.com/office/powerpoint/2010/main" val="1829870538"/>
+        <p14:creationId xmlns:p14="http://schemas.microsoft.com/office/powerpoint/2010/main" val="1023396715"/>
       </p:ext>
     </p:extLst>
   </p:cSld>
@@ -8306,4 +9460,299 @@
     </a:ext>
   </a:extLst>
 </a:theme>
+</file>
+
+<file path=ppt/theme/theme3.xml><?xml version="1.0" encoding="utf-8"?>
+<a:theme xmlns:a="http://schemas.openxmlformats.org/drawingml/2006/main" name="Тема Office">
+  <a:themeElements>
+    <a:clrScheme name="Стандартная">
+      <a:dk1>
+        <a:sysClr val="windowText" lastClr="000000"/>
+      </a:dk1>
+      <a:lt1>
+        <a:sysClr val="window" lastClr="FFFFFF"/>
+      </a:lt1>
+      <a:dk2>
+        <a:srgbClr val="44546A"/>
+      </a:dk2>
+      <a:lt2>
+        <a:srgbClr val="E7E6E6"/>
+      </a:lt2>
+      <a:accent1>
+        <a:srgbClr val="4472C4"/>
+      </a:accent1>
+      <a:accent2>
+        <a:srgbClr val="ED7D31"/>
+      </a:accent2>
+      <a:accent3>
+        <a:srgbClr val="A5A5A5"/>
+      </a:accent3>
+      <a:accent4>
+        <a:srgbClr val="FFC000"/>
+      </a:accent4>
+      <a:accent5>
+        <a:srgbClr val="5B9BD5"/>
+      </a:accent5>
+      <a:accent6>
+        <a:srgbClr val="70AD47"/>
+      </a:accent6>
+      <a:hlink>
+        <a:srgbClr val="0563C1"/>
+      </a:hlink>
+      <a:folHlink>
+        <a:srgbClr val="954F72"/>
+      </a:folHlink>
+    </a:clrScheme>
+    <a:fontScheme name="Стандартная">
+      <a:majorFont>
+        <a:latin typeface="Calibri Light" panose="020F0302020204030204"/>
+        <a:ea typeface=""/>
+        <a:cs typeface=""/>
+        <a:font script="Jpan" typeface="游ゴシック Light"/>
+        <a:font script="Hang" typeface="맑은 고딕"/>
+        <a:font script="Hans" typeface="等线 Light"/>
+        <a:font script="Hant" typeface="新細明體"/>
+        <a:font script="Arab" typeface="Times New Roman"/>
+        <a:font script="Hebr" typeface="Times New Roman"/>
+        <a:font script="Thai" typeface="Angsana New"/>
+        <a:font script="Ethi" typeface="Nyala"/>
+        <a:font script="Beng" typeface="Vrinda"/>
+        <a:font script="Gujr" typeface="Shruti"/>
+        <a:font script="Khmr" typeface="MoolBoran"/>
+        <a:font script="Knda" typeface="Tunga"/>
+        <a:font script="Guru" typeface="Raavi"/>
+        <a:font script="Cans" typeface="Euphemia"/>
+        <a:font script="Cher" typeface="Plantagenet Cherokee"/>
+        <a:font script="Yiii" typeface="Microsoft Yi Baiti"/>
+        <a:font script="Tibt" typeface="Microsoft Himalaya"/>
+        <a:font script="Thaa" typeface="MV Boli"/>
+        <a:font script="Deva" typeface="Mangal"/>
+        <a:font script="Telu" typeface="Gautami"/>
+        <a:font script="Taml" typeface="Latha"/>
+        <a:font script="Syrc" typeface="Estrangelo Edessa"/>
+        <a:font script="Orya" typeface="Kalinga"/>
+        <a:font script="Mlym" typeface="Kartika"/>
+        <a:font script="Laoo" typeface="DokChampa"/>
+        <a:font script="Sinh" typeface="Iskoola Pota"/>
+        <a:font script="Mong" typeface="Mongolian Baiti"/>
+        <a:font script="Viet" typeface="Times New Roman"/>
+        <a:font script="Uigh" typeface="Microsoft Uighur"/>
+        <a:font script="Geor" typeface="Sylfaen"/>
+        <a:font script="Armn" typeface="Arial"/>
+        <a:font script="Bugi" typeface="Leelawadee UI"/>
+        <a:font script="Bopo" typeface="Microsoft JhengHei"/>
+        <a:font script="Java" typeface="Javanese Text"/>
+        <a:font script="Lisu" typeface="Segoe UI"/>
+        <a:font script="Mymr" typeface="Myanmar Text"/>
+        <a:font script="Nkoo" typeface="Ebrima"/>
+        <a:font script="Olck" typeface="Nirmala UI"/>
+        <a:font script="Osma" typeface="Ebrima"/>
+        <a:font script="Phag" typeface="Phagspa"/>
+        <a:font script="Syrn" typeface="Estrangelo Edessa"/>
+        <a:font script="Syrj" typeface="Estrangelo Edessa"/>
+        <a:font script="Syre" typeface="Estrangelo Edessa"/>
+        <a:font script="Sora" typeface="Nirmala UI"/>
+        <a:font script="Tale" typeface="Microsoft Tai Le"/>
+        <a:font script="Talu" typeface="Microsoft New Tai Lue"/>
+        <a:font script="Tfng" typeface="Ebrima"/>
+      </a:majorFont>
+      <a:minorFont>
+        <a:latin typeface="Calibri" panose="020F0502020204030204"/>
+        <a:ea typeface=""/>
+        <a:cs typeface=""/>
+        <a:font script="Jpan" typeface="游ゴシック"/>
+        <a:font script="Hang" typeface="맑은 고딕"/>
+        <a:font script="Hans" typeface="等线"/>
+        <a:font script="Hant" typeface="新細明體"/>
+        <a:font script="Arab" typeface="Arial"/>
+        <a:font script="Hebr" typeface="Arial"/>
+        <a:font script="Thai" typeface="Cordia New"/>
+        <a:font script="Ethi" typeface="Nyala"/>
+        <a:font script="Beng" typeface="Vrinda"/>
+        <a:font script="Gujr" typeface="Shruti"/>
+        <a:font script="Khmr" typeface="DaunPenh"/>
+        <a:font script="Knda" typeface="Tunga"/>
+        <a:font script="Guru" typeface="Raavi"/>
+        <a:font script="Cans" typeface="Euphemia"/>
+        <a:font script="Cher" typeface="Plantagenet Cherokee"/>
+        <a:font script="Yiii" typeface="Microsoft Yi Baiti"/>
+        <a:font script="Tibt" typeface="Microsoft Himalaya"/>
+        <a:font script="Thaa" typeface="MV Boli"/>
+        <a:font script="Deva" typeface="Mangal"/>
+        <a:font script="Telu" typeface="Gautami"/>
+        <a:font script="Taml" typeface="Latha"/>
+        <a:font script="Syrc" typeface="Estrangelo Edessa"/>
+        <a:font script="Orya" typeface="Kalinga"/>
+        <a:font script="Mlym" typeface="Kartika"/>
+        <a:font script="Laoo" typeface="DokChampa"/>
+        <a:font script="Sinh" typeface="Iskoola Pota"/>
+        <a:font script="Mong" typeface="Mongolian Baiti"/>
+        <a:font script="Viet" typeface="Arial"/>
+        <a:font script="Uigh" typeface="Microsoft Uighur"/>
+        <a:font script="Geor" typeface="Sylfaen"/>
+        <a:font script="Armn" typeface="Arial"/>
+        <a:font script="Bugi" typeface="Leelawadee UI"/>
+        <a:font script="Bopo" typeface="Microsoft JhengHei"/>
+        <a:font script="Java" typeface="Javanese Text"/>
+        <a:font script="Lisu" typeface="Segoe UI"/>
+        <a:font script="Mymr" typeface="Myanmar Text"/>
+        <a:font script="Nkoo" typeface="Ebrima"/>
+        <a:font script="Olck" typeface="Nirmala UI"/>
+        <a:font script="Osma" typeface="Ebrima"/>
+        <a:font script="Phag" typeface="Phagspa"/>
+        <a:font script="Syrn" typeface="Estrangelo Edessa"/>
+        <a:font script="Syrj" typeface="Estrangelo Edessa"/>
+        <a:font script="Syre" typeface="Estrangelo Edessa"/>
+        <a:font script="Sora" typeface="Nirmala UI"/>
+        <a:font script="Tale" typeface="Microsoft Tai Le"/>
+        <a:font script="Talu" typeface="Microsoft New Tai Lue"/>
+        <a:font script="Tfng" typeface="Ebrima"/>
+      </a:minorFont>
+    </a:fontScheme>
+    <a:fmtScheme name="Стандартная">
+      <a:fillStyleLst>
+        <a:solidFill>
+          <a:schemeClr val="phClr"/>
+        </a:solidFill>
+        <a:gradFill rotWithShape="1">
+          <a:gsLst>
+            <a:gs pos="0">
+              <a:schemeClr val="phClr">
+                <a:lumMod val="110000"/>
+                <a:satMod val="105000"/>
+                <a:tint val="67000"/>
+              </a:schemeClr>
+            </a:gs>
+            <a:gs pos="50000">
+              <a:schemeClr val="phClr">
+                <a:lumMod val="105000"/>
+                <a:satMod val="103000"/>
+                <a:tint val="73000"/>
+              </a:schemeClr>
+            </a:gs>
+            <a:gs pos="100000">
+              <a:schemeClr val="phClr">
+                <a:lumMod val="105000"/>
+                <a:satMod val="109000"/>
+                <a:tint val="81000"/>
+              </a:schemeClr>
+            </a:gs>
+          </a:gsLst>
+          <a:lin ang="5400000" scaled="0"/>
+        </a:gradFill>
+        <a:gradFill rotWithShape="1">
+          <a:gsLst>
+            <a:gs pos="0">
+              <a:schemeClr val="phClr">
+                <a:satMod val="103000"/>
+                <a:lumMod val="102000"/>
+                <a:tint val="94000"/>
+              </a:schemeClr>
+            </a:gs>
+            <a:gs pos="50000">
+              <a:schemeClr val="phClr">
+                <a:satMod val="110000"/>
+                <a:lumMod val="100000"/>
+                <a:shade val="100000"/>
+              </a:schemeClr>
+            </a:gs>
+            <a:gs pos="100000">
+              <a:schemeClr val="phClr">
+                <a:lumMod val="99000"/>
+                <a:satMod val="120000"/>
+                <a:shade val="78000"/>
+              </a:schemeClr>
+            </a:gs>
+          </a:gsLst>
+          <a:lin ang="5400000" scaled="0"/>
+        </a:gradFill>
+      </a:fillStyleLst>
+      <a:lnStyleLst>
+        <a:ln w="6350" cap="flat" cmpd="sng" algn="ctr">
+          <a:solidFill>
+            <a:schemeClr val="phClr"/>
+          </a:solidFill>
+          <a:prstDash val="solid"/>
+          <a:miter lim="800000"/>
+        </a:ln>
+        <a:ln w="12700" cap="flat" cmpd="sng" algn="ctr">
+          <a:solidFill>
+            <a:schemeClr val="phClr"/>
+          </a:solidFill>
+          <a:prstDash val="solid"/>
+          <a:miter lim="800000"/>
+        </a:ln>
+        <a:ln w="19050" cap="flat" cmpd="sng" algn="ctr">
+          <a:solidFill>
+            <a:schemeClr val="phClr"/>
+          </a:solidFill>
+          <a:prstDash val="solid"/>
+          <a:miter lim="800000"/>
+        </a:ln>
+      </a:lnStyleLst>
+      <a:effectStyleLst>
+        <a:effectStyle>
+          <a:effectLst/>
+        </a:effectStyle>
+        <a:effectStyle>
+          <a:effectLst/>
+        </a:effectStyle>
+        <a:effectStyle>
+          <a:effectLst>
+            <a:outerShdw blurRad="57150" dist="19050" dir="5400000" algn="ctr" rotWithShape="0">
+              <a:srgbClr val="000000">
+                <a:alpha val="63000"/>
+              </a:srgbClr>
+            </a:outerShdw>
+          </a:effectLst>
+        </a:effectStyle>
+      </a:effectStyleLst>
+      <a:bgFillStyleLst>
+        <a:solidFill>
+          <a:schemeClr val="phClr"/>
+        </a:solidFill>
+        <a:solidFill>
+          <a:schemeClr val="phClr">
+            <a:tint val="95000"/>
+            <a:satMod val="170000"/>
+          </a:schemeClr>
+        </a:solidFill>
+        <a:gradFill rotWithShape="1">
+          <a:gsLst>
+            <a:gs pos="0">
+              <a:schemeClr val="phClr">
+                <a:tint val="93000"/>
+                <a:satMod val="150000"/>
+                <a:shade val="98000"/>
+                <a:lumMod val="102000"/>
+              </a:schemeClr>
+            </a:gs>
+            <a:gs pos="50000">
+              <a:schemeClr val="phClr">
+                <a:tint val="98000"/>
+                <a:satMod val="130000"/>
+                <a:shade val="90000"/>
+                <a:lumMod val="103000"/>
+              </a:schemeClr>
+            </a:gs>
+            <a:gs pos="100000">
+              <a:schemeClr val="phClr">
+                <a:shade val="63000"/>
+                <a:satMod val="120000"/>
+              </a:schemeClr>
+            </a:gs>
+          </a:gsLst>
+          <a:lin ang="5400000" scaled="0"/>
+        </a:gradFill>
+      </a:bgFillStyleLst>
+    </a:fmtScheme>
+  </a:themeElements>
+  <a:objectDefaults/>
+  <a:extraClrSchemeLst/>
+  <a:extLst>
+    <a:ext uri="{05A4C25C-085E-4340-85A3-A5531E510DB2}">
+      <thm15:themeFamily xmlns:thm15="http://schemas.microsoft.com/office/thememl/2012/main" name="Office Theme" id="{62F939B6-93AF-4DB8-9C6B-D6C7DFDC589F}" vid="{4A3C46E8-61CC-4603-A589-7422A47A8E4A}"/>
+    </a:ext>
+  </a:extLst>
+</a:theme>
 </file>